--- a/docs/AskTube_AI_Presentation_updated.pptx
+++ b/docs/AskTube_AI_Presentation_updated.pptx
@@ -4,21 +4,24 @@
   <p:sldMasterIdLst>
     <p:sldMasterId id="2147483648" r:id="rId1"/>
   </p:sldMasterIdLst>
+  <p:notesMasterIdLst>
+    <p:notesMasterId r:id="rId14"/>
+  </p:notesMasterIdLst>
   <p:sldIdLst>
-    <p:sldId id="256" r:id="rId7"/>
-    <p:sldId id="257" r:id="rId9"/>
-    <p:sldId id="258" r:id="rId10"/>
-    <p:sldId id="259" r:id="rId11"/>
-    <p:sldId id="260" r:id="rId12"/>
-    <p:sldId id="261" r:id="rId13"/>
-    <p:sldId id="262" r:id="rId14"/>
-    <p:sldId id="263" r:id="rId15"/>
-    <p:sldId id="264" r:id="rId16"/>
-    <p:sldId id="265" r:id="rId17"/>
-    <p:sldId id="266" r:id="rId18"/>
-    <p:sldId id="267" r:id="rId19"/>
+    <p:sldId id="256" r:id="rId2"/>
+    <p:sldId id="257" r:id="rId3"/>
+    <p:sldId id="258" r:id="rId4"/>
+    <p:sldId id="259" r:id="rId5"/>
+    <p:sldId id="260" r:id="rId6"/>
+    <p:sldId id="261" r:id="rId7"/>
+    <p:sldId id="262" r:id="rId8"/>
+    <p:sldId id="263" r:id="rId9"/>
+    <p:sldId id="264" r:id="rId10"/>
+    <p:sldId id="265" r:id="rId11"/>
+    <p:sldId id="266" r:id="rId12"/>
+    <p:sldId id="267" r:id="rId13"/>
   </p:sldIdLst>
-  <p:sldSz cx="12191695" cy="6858000" type="screen4x3"/>
+  <p:sldSz cx="12192000" cy="6858000"/>
   <p:notesSz cx="6858000" cy="9144000"/>
   <p:defaultTextStyle>
     <a:defPPr>
@@ -115,11 +118,27 @@
       </a:defRPr>
     </a:lvl9pPr>
   </p:defaultTextStyle>
+  <p:extLst>
+    <p:ext uri="{EFAFB233-063F-42B5-8137-9DF3F51BA10A}">
+      <p15:sldGuideLst xmlns:p15="http://schemas.microsoft.com/office/powerpoint/2012/main">
+        <p15:guide id="1" orient="horz" pos="2160">
+          <p15:clr>
+            <a:srgbClr val="A4A3A4"/>
+          </p15:clr>
+        </p15:guide>
+        <p15:guide id="2" pos="2880">
+          <p15:clr>
+            <a:srgbClr val="A4A3A4"/>
+          </p15:clr>
+        </p15:guide>
+      </p15:sldGuideLst>
+    </p:ext>
+  </p:extLst>
 </p:presentation>
 </file>
 
 <file path=ppt/notesMasters/notesMaster1.xml><?xml version="1.0" encoding="utf-8"?>
-<p:notesMaster xmlns:a="http://schemas.openxmlformats.org/drawingml/2006/main" xmlns:p="http://schemas.openxmlformats.org/presentationml/2006/main" xmlns:r="http://schemas.openxmlformats.org/officeDocument/2006/relationships">
+<p:notesMaster xmlns:a="http://schemas.openxmlformats.org/drawingml/2006/main" xmlns:r="http://schemas.openxmlformats.org/officeDocument/2006/relationships" xmlns:p="http://schemas.openxmlformats.org/presentationml/2006/main">
   <p:cSld>
     <p:bg>
       <p:bgRef idx="1001">
@@ -140,241 +159,16 @@
           <a:chExt cx="0" cy="0"/>
         </a:xfrm>
       </p:grpSpPr>
-      <p:sp>
-        <p:nvSpPr>
-          <p:cNvPr id="2" name="Header Placeholder 1"/>
-          <p:cNvSpPr>
-            <a:spLocks noGrp="1"/>
-          </p:cNvSpPr>
-          <p:nvPr>
-            <p:ph type="hdr" sz="quarter"/>
-          </p:nvPr>
-        </p:nvSpPr>
-        <p:spPr>
-          <a:xfrm>
-            <a:off x="0" y="0"/>
-            <a:ext cx="2971800" cy="457200"/>
-          </a:xfrm>
-          <a:prstGeom prst="rect">
-            <a:avLst/>
-          </a:prstGeom>
-        </p:spPr>
-        <p:txBody>
-          <a:bodyPr vert="horz" lIns="91440" tIns="45720" rIns="91440" bIns="45720" rtlCol="0"/>
-          <a:lstStyle>
-            <a:lvl1pPr algn="l">
-              <a:defRPr sz="1200"/>
-            </a:lvl1pPr>
-          </a:lstStyle>
-          <a:p>
-            <a:endParaRPr lang="en-US"/>
-          </a:p>
-        </p:txBody>
-      </p:sp>
-      <p:sp>
-        <p:nvSpPr>
-          <p:cNvPr id="3" name="Date Placeholder 2"/>
-          <p:cNvSpPr>
-            <a:spLocks noGrp="1"/>
-          </p:cNvSpPr>
-          <p:nvPr>
-            <p:ph type="dt" idx="1"/>
-          </p:nvPr>
-        </p:nvSpPr>
-        <p:spPr>
-          <a:xfrm>
-            <a:off x="3884613" y="0"/>
-            <a:ext cx="2971800" cy="457200"/>
-          </a:xfrm>
-          <a:prstGeom prst="rect">
-            <a:avLst/>
-          </a:prstGeom>
-        </p:spPr>
-        <p:txBody>
-          <a:bodyPr vert="horz" lIns="91440" tIns="45720" rIns="91440" bIns="45720" rtlCol="0"/>
-          <a:lstStyle>
-            <a:lvl1pPr algn="r">
-              <a:defRPr sz="1200"/>
-            </a:lvl1pPr>
-          </a:lstStyle>
-          <a:p>
-            <a:fld id="{0F89C1C7-3DCD-1040-A9CF-14679D8B5DDD}" type="datetimeFigureOut">
-              <a:rPr lang="en-US" smtClean="0"/>
-              <a:t>10/17/16</a:t>
-            </a:fld>
-            <a:endParaRPr lang="en-US"/>
-          </a:p>
-        </p:txBody>
-      </p:sp>
-      <p:sp>
-        <p:nvSpPr>
-          <p:cNvPr id="4" name="Slide Image Placeholder 3"/>
-          <p:cNvSpPr>
-            <a:spLocks noGrp="1" noRot="1" noChangeAspect="1"/>
-          </p:cNvSpPr>
-          <p:nvPr>
-            <p:ph type="sldImg" idx="2"/>
-          </p:nvPr>
-        </p:nvSpPr>
-        <p:spPr>
-          <a:xfrm>
-            <a:off x="1143000" y="685800"/>
-            <a:ext cx="4572000" cy="3429000"/>
-          </a:xfrm>
-          <a:prstGeom prst="rect">
-            <a:avLst/>
-          </a:prstGeom>
-          <a:noFill/>
-          <a:ln w="12700">
-            <a:solidFill>
-              <a:prstClr val="black"/>
-            </a:solidFill>
-          </a:ln>
-        </p:spPr>
-        <p:txBody>
-          <a:bodyPr vert="horz" lIns="91440" tIns="45720" rIns="91440" bIns="45720" rtlCol="0" anchor="ctr"/>
-          <a:lstStyle/>
-          <a:p>
-            <a:endParaRPr lang="en-US"/>
-          </a:p>
-        </p:txBody>
-      </p:sp>
-      <p:sp>
-        <p:nvSpPr>
-          <p:cNvPr id="5" name="Notes Placeholder 4"/>
-          <p:cNvSpPr>
-            <a:spLocks noGrp="1"/>
-          </p:cNvSpPr>
-          <p:nvPr>
-            <p:ph type="body" sz="quarter" idx="3"/>
-          </p:nvPr>
-        </p:nvSpPr>
-        <p:spPr>
-          <a:xfrm>
-            <a:off x="685800" y="4343400"/>
-            <a:ext cx="5486400" cy="4114800"/>
-          </a:xfrm>
-          <a:prstGeom prst="rect">
-            <a:avLst/>
-          </a:prstGeom>
-        </p:spPr>
-        <p:txBody>
-          <a:bodyPr vert="horz" lIns="91440" tIns="45720" rIns="91440" bIns="45720" rtlCol="0"/>
-          <a:lstStyle/>
-          <a:p>
-            <a:pPr lvl="0"/>
-            <a:r>
-              <a:rPr lang="en-US" smtClean="0"/>
-              <a:t>Click to edit Master text styles</a:t>
-            </a:r>
-          </a:p>
-          <a:p>
-            <a:pPr lvl="1"/>
-            <a:r>
-              <a:rPr lang="en-US" smtClean="0"/>
-              <a:t>Second level</a:t>
-            </a:r>
-          </a:p>
-          <a:p>
-            <a:pPr lvl="2"/>
-            <a:r>
-              <a:rPr lang="en-US" smtClean="0"/>
-              <a:t>Third level</a:t>
-            </a:r>
-          </a:p>
-          <a:p>
-            <a:pPr lvl="3"/>
-            <a:r>
-              <a:rPr lang="en-US" smtClean="0"/>
-              <a:t>Fourth level</a:t>
-            </a:r>
-          </a:p>
-          <a:p>
-            <a:pPr lvl="4"/>
-            <a:r>
-              <a:rPr lang="en-US" smtClean="0"/>
-              <a:t>Fifth level</a:t>
-            </a:r>
-            <a:endParaRPr lang="en-US"/>
-          </a:p>
-        </p:txBody>
-      </p:sp>
-      <p:sp>
-        <p:nvSpPr>
-          <p:cNvPr id="6" name="Footer Placeholder 5"/>
-          <p:cNvSpPr>
-            <a:spLocks noGrp="1"/>
-          </p:cNvSpPr>
-          <p:nvPr>
-            <p:ph type="ftr" sz="quarter" idx="4"/>
-          </p:nvPr>
-        </p:nvSpPr>
-        <p:spPr>
-          <a:xfrm>
-            <a:off x="0" y="8685213"/>
-            <a:ext cx="2971800" cy="457200"/>
-          </a:xfrm>
-          <a:prstGeom prst="rect">
-            <a:avLst/>
-          </a:prstGeom>
-        </p:spPr>
-        <p:txBody>
-          <a:bodyPr vert="horz" lIns="91440" tIns="45720" rIns="91440" bIns="45720" rtlCol="0" anchor="b"/>
-          <a:lstStyle>
-            <a:lvl1pPr algn="l">
-              <a:defRPr sz="1200"/>
-            </a:lvl1pPr>
-          </a:lstStyle>
-          <a:p>
-            <a:endParaRPr lang="en-US"/>
-          </a:p>
-        </p:txBody>
-      </p:sp>
-      <p:sp>
-        <p:nvSpPr>
-          <p:cNvPr id="7" name="Slide Number Placeholder 6"/>
-          <p:cNvSpPr>
-            <a:spLocks noGrp="1"/>
-          </p:cNvSpPr>
-          <p:nvPr>
-            <p:ph type="sldNum" sz="quarter" idx="5"/>
-          </p:nvPr>
-        </p:nvSpPr>
-        <p:spPr>
-          <a:xfrm>
-            <a:off x="3884613" y="8685213"/>
-            <a:ext cx="2971800" cy="457200"/>
-          </a:xfrm>
-          <a:prstGeom prst="rect">
-            <a:avLst/>
-          </a:prstGeom>
-        </p:spPr>
-        <p:txBody>
-          <a:bodyPr vert="horz" lIns="91440" tIns="45720" rIns="91440" bIns="45720" rtlCol="0" anchor="b"/>
-          <a:lstStyle>
-            <a:lvl1pPr algn="r">
-              <a:defRPr sz="1200"/>
-            </a:lvl1pPr>
-          </a:lstStyle>
-          <a:p>
-            <a:fld id="{BB5E49A5-4136-284D-997B-48E1D791AD67}" type="slidenum">
-              <a:rPr lang="en-US" smtClean="0"/>
-              <a:t>‹#›</a:t>
-            </a:fld>
-            <a:endParaRPr lang="en-US"/>
-          </a:p>
-        </p:txBody>
-      </p:sp>
     </p:spTree>
     <p:extLst>
       <p:ext uri="{BB962C8B-B14F-4D97-AF65-F5344CB8AC3E}">
-        <p14:creationId xmlns:p14="http://schemas.microsoft.com/office/powerpoint/2010/main" val="2623252185"/>
+        <p14:creationId xmlns:p14="http://schemas.microsoft.com/office/powerpoint/2010/main" val="1891214831"/>
       </p:ext>
     </p:extLst>
   </p:cSld>
   <p:clrMap bg1="lt1" tx1="dk1" bg2="lt2" tx2="dk2" accent1="accent1" accent2="accent2" accent3="accent3" accent4="accent4" accent5="accent5" accent6="accent6" hlink="hlink" folHlink="folHlink"/>
   <p:notesStyle>
-    <a:lvl1pPr marL="0" algn="l" defTabSz="457200" rtl="0" eaLnBrk="1" latinLnBrk="0" hangingPunct="1">
+    <a:lvl1pPr marL="0" algn="l" defTabSz="914400" rtl="0" eaLnBrk="1" latinLnBrk="0" hangingPunct="1">
       <a:defRPr sz="1200" kern="1200">
         <a:solidFill>
           <a:schemeClr val="tx1"/>
@@ -384,7 +178,7 @@
         <a:cs typeface="+mn-cs"/>
       </a:defRPr>
     </a:lvl1pPr>
-    <a:lvl2pPr marL="457200" algn="l" defTabSz="457200" rtl="0" eaLnBrk="1" latinLnBrk="0" hangingPunct="1">
+    <a:lvl2pPr marL="457200" algn="l" defTabSz="914400" rtl="0" eaLnBrk="1" latinLnBrk="0" hangingPunct="1">
       <a:defRPr sz="1200" kern="1200">
         <a:solidFill>
           <a:schemeClr val="tx1"/>
@@ -394,7 +188,7 @@
         <a:cs typeface="+mn-cs"/>
       </a:defRPr>
     </a:lvl2pPr>
-    <a:lvl3pPr marL="914400" algn="l" defTabSz="457200" rtl="0" eaLnBrk="1" latinLnBrk="0" hangingPunct="1">
+    <a:lvl3pPr marL="914400" algn="l" defTabSz="914400" rtl="0" eaLnBrk="1" latinLnBrk="0" hangingPunct="1">
       <a:defRPr sz="1200" kern="1200">
         <a:solidFill>
           <a:schemeClr val="tx1"/>
@@ -404,7 +198,7 @@
         <a:cs typeface="+mn-cs"/>
       </a:defRPr>
     </a:lvl3pPr>
-    <a:lvl4pPr marL="1371600" algn="l" defTabSz="457200" rtl="0" eaLnBrk="1" latinLnBrk="0" hangingPunct="1">
+    <a:lvl4pPr marL="1371600" algn="l" defTabSz="914400" rtl="0" eaLnBrk="1" latinLnBrk="0" hangingPunct="1">
       <a:defRPr sz="1200" kern="1200">
         <a:solidFill>
           <a:schemeClr val="tx1"/>
@@ -414,7 +208,7 @@
         <a:cs typeface="+mn-cs"/>
       </a:defRPr>
     </a:lvl4pPr>
-    <a:lvl5pPr marL="1828800" algn="l" defTabSz="457200" rtl="0" eaLnBrk="1" latinLnBrk="0" hangingPunct="1">
+    <a:lvl5pPr marL="1828800" algn="l" defTabSz="914400" rtl="0" eaLnBrk="1" latinLnBrk="0" hangingPunct="1">
       <a:defRPr sz="1200" kern="1200">
         <a:solidFill>
           <a:schemeClr val="tx1"/>
@@ -424,7 +218,7 @@
         <a:cs typeface="+mn-cs"/>
       </a:defRPr>
     </a:lvl5pPr>
-    <a:lvl6pPr marL="2286000" algn="l" defTabSz="457200" rtl="0" eaLnBrk="1" latinLnBrk="0" hangingPunct="1">
+    <a:lvl6pPr marL="2286000" algn="l" defTabSz="914400" rtl="0" eaLnBrk="1" latinLnBrk="0" hangingPunct="1">
       <a:defRPr sz="1200" kern="1200">
         <a:solidFill>
           <a:schemeClr val="tx1"/>
@@ -434,7 +228,7 @@
         <a:cs typeface="+mn-cs"/>
       </a:defRPr>
     </a:lvl6pPr>
-    <a:lvl7pPr marL="2743200" algn="l" defTabSz="457200" rtl="0" eaLnBrk="1" latinLnBrk="0" hangingPunct="1">
+    <a:lvl7pPr marL="2743200" algn="l" defTabSz="914400" rtl="0" eaLnBrk="1" latinLnBrk="0" hangingPunct="1">
       <a:defRPr sz="1200" kern="1200">
         <a:solidFill>
           <a:schemeClr val="tx1"/>
@@ -444,7 +238,7 @@
         <a:cs typeface="+mn-cs"/>
       </a:defRPr>
     </a:lvl7pPr>
-    <a:lvl8pPr marL="3200400" algn="l" defTabSz="457200" rtl="0" eaLnBrk="1" latinLnBrk="0" hangingPunct="1">
+    <a:lvl8pPr marL="3200400" algn="l" defTabSz="914400" rtl="0" eaLnBrk="1" latinLnBrk="0" hangingPunct="1">
       <a:defRPr sz="1200" kern="1200">
         <a:solidFill>
           <a:schemeClr val="tx1"/>
@@ -454,7 +248,7 @@
         <a:cs typeface="+mn-cs"/>
       </a:defRPr>
     </a:lvl8pPr>
-    <a:lvl9pPr marL="3657600" algn="l" defTabSz="457200" rtl="0" eaLnBrk="1" latinLnBrk="0" hangingPunct="1">
+    <a:lvl9pPr marL="3657600" algn="l" defTabSz="914400" rtl="0" eaLnBrk="1" latinLnBrk="0" hangingPunct="1">
       <a:defRPr sz="1200" kern="1200">
         <a:solidFill>
           <a:schemeClr val="tx1"/>
@@ -469,7 +263,7 @@
 </file>
 
 <file path=ppt/notesSlides/notesSlide1.xml><?xml version="1.0" encoding="utf-8"?>
-<p:notes xmlns:a="http://schemas.openxmlformats.org/drawingml/2006/main" xmlns:p="http://schemas.openxmlformats.org/presentationml/2006/main" xmlns:r="http://schemas.openxmlformats.org/officeDocument/2006/relationships">
+<p:notes xmlns:a="http://schemas.openxmlformats.org/drawingml/2006/main" xmlns:r="http://schemas.openxmlformats.org/officeDocument/2006/relationships" xmlns:p="http://schemas.openxmlformats.org/presentationml/2006/main">
   <p:cSld>
     <p:spTree>
       <p:nvGrpSpPr>
@@ -489,7 +283,7 @@
         <p:nvSpPr>
           <p:cNvPr id="2" name="Slide Image Placeholder 1"/>
           <p:cNvSpPr>
-            <a:spLocks noGrp="1"/>
+            <a:spLocks noGrp="1" noRot="1" noChangeAspect="1"/>
           </p:cNvSpPr>
           <p:nvPr>
             <p:ph type="sldImg" idx="2"/>
@@ -504,7 +298,7 @@
             <a:spLocks noGrp="1"/>
           </p:cNvSpPr>
           <p:nvPr>
-            <p:ph type="body" idx="3" sz="quarter"/>
+            <p:ph type="body" sz="quarter" idx="3"/>
           </p:nvPr>
         </p:nvSpPr>
         <p:spPr/>
@@ -513,13 +307,31 @@
           <a:lstStyle/>
           <a:p>
             <a:r>
-              <a:t>~20 seconds</a:t>
-            </a:r>
-          </a:p>
-          <a:p/>
-          <a:p>
-            <a:r>
-              <a:t>Hi, I'm Sabeur. AskTube AI is an AI platform that lets you chat with any YouTube video using its transcript. It is not a generic chatbot — every answer is grounded in the video, with timestamp citations so you can verify exactly where the information comes from. I also added production-style analytics so the product and RAG pipeline are measurable.</a:t>
+              <a:t>[30 sec] AskTube AI is my final project.</a:t>
+            </a:r>
+          </a:p>
+          <a:p>
+            <a:endParaRPr/>
+          </a:p>
+          <a:p>
+            <a:r>
+              <a:t>The idea is simple: the user searches for a YouTube video, the app processes the transcript, and then the user can chat with the video content.</a:t>
+            </a:r>
+          </a:p>
+          <a:p>
+            <a:endParaRPr/>
+          </a:p>
+          <a:p>
+            <a:r>
+              <a:t>The answers are not generic AI answers — they are grounded in the transcript and include timestamp citations, so the user can verify exactly where the answer came from.</a:t>
+            </a:r>
+          </a:p>
+          <a:p>
+            <a:endParaRPr/>
+          </a:p>
+          <a:p>
+            <a:r>
+              <a:t>KEY MESSAGE: This is a learning assistant for YouTube videos, not just a normal chatbot.</a:t>
             </a:r>
           </a:p>
         </p:txBody>
@@ -531,7 +343,7 @@
             <a:spLocks noGrp="1"/>
           </p:cNvSpPr>
           <p:nvPr>
-            <p:ph type="sldNum" idx="5" sz="quarter"/>
+            <p:ph type="sldNum" sz="quarter" idx="5"/>
           </p:nvPr>
         </p:nvSpPr>
         <p:spPr/>
@@ -545,7 +357,7 @@
 </file>
 
 <file path=ppt/notesSlides/notesSlide10.xml><?xml version="1.0" encoding="utf-8"?>
-<p:notes xmlns:a="http://schemas.openxmlformats.org/drawingml/2006/main" xmlns:p="http://schemas.openxmlformats.org/presentationml/2006/main" xmlns:r="http://schemas.openxmlformats.org/officeDocument/2006/relationships">
+<p:notes xmlns:a="http://schemas.openxmlformats.org/drawingml/2006/main" xmlns:r="http://schemas.openxmlformats.org/officeDocument/2006/relationships" xmlns:p="http://schemas.openxmlformats.org/presentationml/2006/main">
   <p:cSld>
     <p:spTree>
       <p:nvGrpSpPr>
@@ -565,7 +377,7 @@
         <p:nvSpPr>
           <p:cNvPr id="2" name="Slide Image Placeholder 1"/>
           <p:cNvSpPr>
-            <a:spLocks noGrp="1"/>
+            <a:spLocks noGrp="1" noRot="1" noChangeAspect="1"/>
           </p:cNvSpPr>
           <p:nvPr>
             <p:ph type="sldImg" idx="2"/>
@@ -580,7 +392,7 @@
             <a:spLocks noGrp="1"/>
           </p:cNvSpPr>
           <p:nvPr>
-            <p:ph type="body" idx="3" sz="quarter"/>
+            <p:ph type="body" sz="quarter" idx="3"/>
           </p:nvPr>
         </p:nvSpPr>
         <p:spPr/>
@@ -589,13 +401,31 @@
           <a:lstStyle/>
           <a:p>
             <a:r>
-              <a:t>~35 seconds</a:t>
-            </a:r>
-          </a:p>
-          <a:p/>
-          <a:p>
-            <a:r>
-              <a:t>The project has 98 pytest tests covering routes, services, tools, WebSocket ingest, speech, and the RAG pipeline. I also built 17 hand-crafted RAG evaluation cases that test answerable questions, refusals, citation accuracy, summaries, memory, and hallucination prevention — all pass with zero behavioral failures. LangSmith tracing is available for live chain inspection, and the inline heuristic evaluator scores every RAG response at inference time.</a:t>
+              <a:t>[35 sec] For testing, the backend has 98 pytest tests covering routes, services, tools, WebSocket ingestion, speech transcription, memory, vector storage, and RAG behavior.</a:t>
+            </a:r>
+          </a:p>
+          <a:p>
+            <a:endParaRPr/>
+          </a:p>
+          <a:p>
+            <a:r>
+              <a:t>I also created a RAG evaluation dataset with 17 cases testing answerable questions, refusals, citation accuracy, summaries, memory, and hallucination prevention.</a:t>
+            </a:r>
+          </a:p>
+          <a:p>
+            <a:endParaRPr/>
+          </a:p>
+          <a:p>
+            <a:r>
+              <a:t>LangSmith tracing can also be enabled to inspect latency, context, tool calls, and answer quality.</a:t>
+            </a:r>
+          </a:p>
+          <a:p>
+            <a:endParaRPr/>
+          </a:p>
+          <a:p>
+            <a:r>
+              <a:t>KEY MESSAGE: I did not only build the app — I also tested the AI behavior.</a:t>
             </a:r>
           </a:p>
         </p:txBody>
@@ -607,7 +437,7 @@
             <a:spLocks noGrp="1"/>
           </p:cNvSpPr>
           <p:nvPr>
-            <p:ph type="sldNum" idx="5" sz="quarter"/>
+            <p:ph type="sldNum" sz="quarter" idx="5"/>
           </p:nvPr>
         </p:nvSpPr>
         <p:spPr/>
@@ -621,7 +451,7 @@
 </file>
 
 <file path=ppt/notesSlides/notesSlide11.xml><?xml version="1.0" encoding="utf-8"?>
-<p:notes xmlns:a="http://schemas.openxmlformats.org/drawingml/2006/main" xmlns:p="http://schemas.openxmlformats.org/presentationml/2006/main" xmlns:r="http://schemas.openxmlformats.org/officeDocument/2006/relationships">
+<p:notes xmlns:a="http://schemas.openxmlformats.org/drawingml/2006/main" xmlns:r="http://schemas.openxmlformats.org/officeDocument/2006/relationships" xmlns:p="http://schemas.openxmlformats.org/presentationml/2006/main">
   <p:cSld>
     <p:spTree>
       <p:nvGrpSpPr>
@@ -641,7 +471,7 @@
         <p:nvSpPr>
           <p:cNvPr id="2" name="Slide Image Placeholder 1"/>
           <p:cNvSpPr>
-            <a:spLocks noGrp="1"/>
+            <a:spLocks noGrp="1" noRot="1" noChangeAspect="1"/>
           </p:cNvSpPr>
           <p:nvPr>
             <p:ph type="sldImg" idx="2"/>
@@ -656,7 +486,7 @@
             <a:spLocks noGrp="1"/>
           </p:cNvSpPr>
           <p:nvPr>
-            <p:ph type="body" idx="3" sz="quarter"/>
+            <p:ph type="body" sz="quarter" idx="3"/>
           </p:nvPr>
         </p:nvSpPr>
         <p:spPr/>
@@ -665,37 +495,61 @@
           <a:lstStyle/>
           <a:p>
             <a:r>
-              <a:t>~90 seconds</a:t>
-            </a:r>
-          </a:p>
-          <a:p/>
-          <a:p>
-            <a:r>
-              <a:t>Let me show you the live app. Open http://18.157.233.122:3001/ — this is running on AWS EC2 with a Webshare residential proxy to bypass YouTube's cloud IP restrictions.</a:t>
-            </a:r>
-          </a:p>
-          <a:p/>
-          <a:p>
-            <a:r>
-              <a:t>[Search] I'll type 'python tutorial for beginners' and apply a duration filter. [Results appear] Pick a video and click Prepare. [Watch the progress steps: metadata, transcript, chunking, embeddings, storage.]</a:t>
-            </a:r>
-          </a:p>
-          <a:p/>
-          <a:p>
-            <a:r>
-              <a:t>[Chat] Now I ask: 'What is Python used for?' — [Answer appears with timestamp chips] See the citations — each one links to the exact moment in the video. [Click a timestamp]</a:t>
-            </a:r>
-          </a:p>
-          <a:p/>
-          <a:p>
-            <a:r>
-              <a:t>[Follow-up] Now a follow-up: 'Can you give me an example?' — the memory keeps the context so it understands what I mean.</a:t>
-            </a:r>
-          </a:p>
-          <a:p/>
-          <a:p>
-            <a:r>
-              <a:t>[Refusal] Now I ask something off-topic like 'What is the weather today?' — it refuses. It only answers from the video transcript. That is the trust guarantee.</a:t>
+              <a:t>[40 sec] For the demo I will show the main flow: search, prepare, ask, and verify.</a:t>
+            </a:r>
+          </a:p>
+          <a:p>
+            <a:endParaRPr/>
+          </a:p>
+          <a:p>
+            <a:r>
+              <a:t>Steps:</a:t>
+            </a:r>
+          </a:p>
+          <a:p>
+            <a:r>
+              <a:t>1. Search "python tutorial for beginners" with a duration filter.</a:t>
+            </a:r>
+          </a:p>
+          <a:p>
+            <a:r>
+              <a:t>2. Pick a video and click Prepare — show the real ingestion progress.</a:t>
+            </a:r>
+          </a:p>
+          <a:p>
+            <a:r>
+              <a:t>3. Ask: "What is Python used for?" — show timestamp citations.</a:t>
+            </a:r>
+          </a:p>
+          <a:p>
+            <a:r>
+              <a:t>4. Ask a follow-up to demonstrate memory.</a:t>
+            </a:r>
+          </a:p>
+          <a:p>
+            <a:r>
+              <a:t>5. Ask an unrelated question to show refusal behavior.</a:t>
+            </a:r>
+          </a:p>
+          <a:p>
+            <a:r>
+              <a:t>6. Show /analytics and /metrics if time allows.</a:t>
+            </a:r>
+          </a:p>
+          <a:p>
+            <a:endParaRPr/>
+          </a:p>
+          <a:p>
+            <a:r>
+              <a:t>I can show the EC2 deployment to prove Docker works on a server. For the full transcript/RAG demo, local Docker is more reliable because YouTube blocks transcript requests from cloud IP ranges.</a:t>
+            </a:r>
+          </a:p>
+          <a:p>
+            <a:endParaRPr/>
+          </a:p>
+          <a:p>
+            <a:r>
+              <a:t>KEY MESSAGE: EC2 proves deployment; local demo proves full transcript ingestion.</a:t>
             </a:r>
           </a:p>
         </p:txBody>
@@ -707,7 +561,7 @@
             <a:spLocks noGrp="1"/>
           </p:cNvSpPr>
           <p:nvPr>
-            <p:ph type="sldNum" idx="5" sz="quarter"/>
+            <p:ph type="sldNum" sz="quarter" idx="5"/>
           </p:nvPr>
         </p:nvSpPr>
         <p:spPr/>
@@ -721,7 +575,7 @@
 </file>
 
 <file path=ppt/notesSlides/notesSlide12.xml><?xml version="1.0" encoding="utf-8"?>
-<p:notes xmlns:a="http://schemas.openxmlformats.org/drawingml/2006/main" xmlns:p="http://schemas.openxmlformats.org/presentationml/2006/main" xmlns:r="http://schemas.openxmlformats.org/officeDocument/2006/relationships">
+<p:notes xmlns:a="http://schemas.openxmlformats.org/drawingml/2006/main" xmlns:r="http://schemas.openxmlformats.org/officeDocument/2006/relationships" xmlns:p="http://schemas.openxmlformats.org/presentationml/2006/main">
   <p:cSld>
     <p:spTree>
       <p:nvGrpSpPr>
@@ -741,7 +595,7 @@
         <p:nvSpPr>
           <p:cNvPr id="2" name="Slide Image Placeholder 1"/>
           <p:cNvSpPr>
-            <a:spLocks noGrp="1"/>
+            <a:spLocks noGrp="1" noRot="1" noChangeAspect="1"/>
           </p:cNvSpPr>
           <p:nvPr>
             <p:ph type="sldImg" idx="2"/>
@@ -756,7 +610,7 @@
             <a:spLocks noGrp="1"/>
           </p:cNvSpPr>
           <p:nvPr>
-            <p:ph type="body" idx="3" sz="quarter"/>
+            <p:ph type="body" sz="quarter" idx="3"/>
           </p:nvPr>
         </p:nvSpPr>
         <p:spPr/>
@@ -765,13 +619,31 @@
           <a:lstStyle/>
           <a:p>
             <a:r>
-              <a:t>~15 seconds</a:t>
-            </a:r>
-          </a:p>
-          <a:p/>
-          <a:p>
-            <a:r>
-              <a:t>AskTube AI covers all the mandatory IronHack requirements: LLM chatbot, LangChain tools, conversational memory, ChromaDB vector database, text processing, a polished UI, 98 tests, RAG evaluation, analytics/observability, and Docker deployment on EC2. Thank you.</a:t>
+              <a:t>[30 sec] To summarize, AskTube AI meets the main project requirements: LLM chatbot, tools, memory, vector database, text processing, UI, tests, evaluation, and deployment.</a:t>
+            </a:r>
+          </a:p>
+          <a:p>
+            <a:endParaRPr/>
+          </a:p>
+          <a:p>
+            <a:r>
+              <a:t>It also includes optional features: voice input, Whisper fallback, streaming, TTS, 3D assistant, analytics, Prometheus metrics, and LangSmith tracing.</a:t>
+            </a:r>
+          </a:p>
+          <a:p>
+            <a:endParaRPr/>
+          </a:p>
+          <a:p>
+            <a:r>
+              <a:t>The main future improvements: persistent user accounts, multi-video comparison, HTTPS with a custom domain, and a stronger production transcript proxy.</a:t>
+            </a:r>
+          </a:p>
+          <a:p>
+            <a:endParaRPr/>
+          </a:p>
+          <a:p>
+            <a:r>
+              <a:t>FINAL LINE: AskTube AI makes YouTube videos learnable by conversation, while keeping the answer grounded in the original transcript.</a:t>
             </a:r>
           </a:p>
         </p:txBody>
@@ -783,7 +655,7 @@
             <a:spLocks noGrp="1"/>
           </p:cNvSpPr>
           <p:nvPr>
-            <p:ph type="sldNum" idx="5" sz="quarter"/>
+            <p:ph type="sldNum" sz="quarter" idx="5"/>
           </p:nvPr>
         </p:nvSpPr>
         <p:spPr/>
@@ -797,7 +669,7 @@
 </file>
 
 <file path=ppt/notesSlides/notesSlide2.xml><?xml version="1.0" encoding="utf-8"?>
-<p:notes xmlns:a="http://schemas.openxmlformats.org/drawingml/2006/main" xmlns:p="http://schemas.openxmlformats.org/presentationml/2006/main" xmlns:r="http://schemas.openxmlformats.org/officeDocument/2006/relationships">
+<p:notes xmlns:a="http://schemas.openxmlformats.org/drawingml/2006/main" xmlns:r="http://schemas.openxmlformats.org/officeDocument/2006/relationships" xmlns:p="http://schemas.openxmlformats.org/presentationml/2006/main">
   <p:cSld>
     <p:spTree>
       <p:nvGrpSpPr>
@@ -817,7 +689,7 @@
         <p:nvSpPr>
           <p:cNvPr id="2" name="Slide Image Placeholder 1"/>
           <p:cNvSpPr>
-            <a:spLocks noGrp="1"/>
+            <a:spLocks noGrp="1" noRot="1" noChangeAspect="1"/>
           </p:cNvSpPr>
           <p:nvPr>
             <p:ph type="sldImg" idx="2"/>
@@ -832,7 +704,7 @@
             <a:spLocks noGrp="1"/>
           </p:cNvSpPr>
           <p:nvPr>
-            <p:ph type="body" idx="3" sz="quarter"/>
+            <p:ph type="body" sz="quarter" idx="3"/>
           </p:nvPr>
         </p:nvSpPr>
         <p:spPr/>
@@ -841,19 +713,31 @@
           <a:lstStyle/>
           <a:p>
             <a:r>
-              <a:t>~40 seconds</a:t>
-            </a:r>
-          </a:p>
-          <a:p/>
-          <a:p>
-            <a:r>
-              <a:t>YouTube has over 800 million videos. Learning from long videos is frustrating — you scrub back and forth looking for one specific answer.</a:t>
-            </a:r>
-          </a:p>
-          <a:p/>
-          <a:p>
-            <a:r>
-              <a:t>AskTube solves this by turning any video into a conversational knowledge base. You ask a question and the AI answers using the transcript, with the exact timestamp. The key rule: if the transcript doesn't contain the answer, the system refuses — no hallucinations, no invented content.</a:t>
+              <a:t>[45 sec] The problem I wanted to solve is that YouTube has a lot of good learning content, but long videos are difficult to search inside.</a:t>
+            </a:r>
+          </a:p>
+          <a:p>
+            <a:endParaRPr/>
+          </a:p>
+          <a:p>
+            <a:r>
+              <a:t>AskTube AI turns the video transcript into a searchable knowledge base. The user searches, chooses a video, the backend processes the transcript, and then the user can ask questions.</a:t>
+            </a:r>
+          </a:p>
+          <a:p>
+            <a:endParaRPr/>
+          </a:p>
+          <a:p>
+            <a:r>
+              <a:t>The trust rule is very important: if the transcript does not contain the answer, the assistant refuses instead of inventing.</a:t>
+            </a:r>
+          </a:p>
+          <a:p>
+            <a:endParaRPr/>
+          </a:p>
+          <a:p>
+            <a:r>
+              <a:t>KEY MESSAGE: The value is speed plus trust.</a:t>
             </a:r>
           </a:p>
         </p:txBody>
@@ -865,7 +749,7 @@
             <a:spLocks noGrp="1"/>
           </p:cNvSpPr>
           <p:nvPr>
-            <p:ph type="sldNum" idx="5" sz="quarter"/>
+            <p:ph type="sldNum" sz="quarter" idx="5"/>
           </p:nvPr>
         </p:nvSpPr>
         <p:spPr/>
@@ -879,7 +763,7 @@
 </file>
 
 <file path=ppt/notesSlides/notesSlide3.xml><?xml version="1.0" encoding="utf-8"?>
-<p:notes xmlns:a="http://schemas.openxmlformats.org/drawingml/2006/main" xmlns:p="http://schemas.openxmlformats.org/presentationml/2006/main" xmlns:r="http://schemas.openxmlformats.org/officeDocument/2006/relationships">
+<p:notes xmlns:a="http://schemas.openxmlformats.org/drawingml/2006/main" xmlns:r="http://schemas.openxmlformats.org/officeDocument/2006/relationships" xmlns:p="http://schemas.openxmlformats.org/presentationml/2006/main">
   <p:cSld>
     <p:spTree>
       <p:nvGrpSpPr>
@@ -899,7 +783,7 @@
         <p:nvSpPr>
           <p:cNvPr id="2" name="Slide Image Placeholder 1"/>
           <p:cNvSpPr>
-            <a:spLocks noGrp="1"/>
+            <a:spLocks noGrp="1" noRot="1" noChangeAspect="1"/>
           </p:cNvSpPr>
           <p:nvPr>
             <p:ph type="sldImg" idx="2"/>
@@ -914,7 +798,7 @@
             <a:spLocks noGrp="1"/>
           </p:cNvSpPr>
           <p:nvPr>
-            <p:ph type="body" idx="3" sz="quarter"/>
+            <p:ph type="body" sz="quarter" idx="3"/>
           </p:nvPr>
         </p:nvSpPr>
         <p:spPr/>
@@ -923,19 +807,46 @@
           <a:lstStyle/>
           <a:p>
             <a:r>
-              <a:t>~35 seconds</a:t>
-            </a:r>
-          </a:p>
-          <a:p/>
-          <a:p>
-            <a:r>
-              <a:t>The flow is four steps. Search for a topic by text or voice. Pick a video from a carousel. The app processes the transcript in real time — you see each step happening. Then you chat with the video content and get answers with clickable timestamp citations.</a:t>
-            </a:r>
-          </a:p>
-          <a:p/>
-          <a:p>
-            <a:r>
-              <a:t>The whole journey is guided by a 3D robot companion that moves around the screen and speaks at each stage.</a:t>
+              <a:t>[40 sec] The user journey has four steps.</a:t>
+            </a:r>
+          </a:p>
+          <a:p>
+            <a:endParaRPr/>
+          </a:p>
+          <a:p>
+            <a:r>
+              <a:t>1. Search by text or voice.</a:t>
+            </a:r>
+          </a:p>
+          <a:p>
+            <a:r>
+              <a:t>2. Choose a video from a Netflix-style carousel.</a:t>
+            </a:r>
+          </a:p>
+          <a:p>
+            <a:r>
+              <a:t>3. The backend extracts the transcript, chunks it, embeds it, and stores it in ChromaDB.</a:t>
+            </a:r>
+          </a:p>
+          <a:p>
+            <a:r>
+              <a:t>4. The user chats with the video and gets timestamped answers.</a:t>
+            </a:r>
+          </a:p>
+          <a:p>
+            <a:endParaRPr/>
+          </a:p>
+          <a:p>
+            <a:r>
+              <a:t>I added duration filters, loading states, smooth animations, and a 3D assistant to make the flow feel like a real product.</a:t>
+            </a:r>
+          </a:p>
+          <a:p>
+            <a:endParaRPr/>
+          </a:p>
+          <a:p>
+            <a:r>
+              <a:t>KEY MESSAGE: The technical pipeline is hidden behind a simple user flow.</a:t>
             </a:r>
           </a:p>
         </p:txBody>
@@ -947,7 +858,7 @@
             <a:spLocks noGrp="1"/>
           </p:cNvSpPr>
           <p:nvPr>
-            <p:ph type="sldNum" idx="5" sz="quarter"/>
+            <p:ph type="sldNum" sz="quarter" idx="5"/>
           </p:nvPr>
         </p:nvSpPr>
         <p:spPr/>
@@ -961,7 +872,7 @@
 </file>
 
 <file path=ppt/notesSlides/notesSlide4.xml><?xml version="1.0" encoding="utf-8"?>
-<p:notes xmlns:a="http://schemas.openxmlformats.org/drawingml/2006/main" xmlns:p="http://schemas.openxmlformats.org/presentationml/2006/main" xmlns:r="http://schemas.openxmlformats.org/officeDocument/2006/relationships">
+<p:notes xmlns:a="http://schemas.openxmlformats.org/drawingml/2006/main" xmlns:r="http://schemas.openxmlformats.org/officeDocument/2006/relationships" xmlns:p="http://schemas.openxmlformats.org/presentationml/2006/main">
   <p:cSld>
     <p:spTree>
       <p:nvGrpSpPr>
@@ -981,7 +892,7 @@
         <p:nvSpPr>
           <p:cNvPr id="2" name="Slide Image Placeholder 1"/>
           <p:cNvSpPr>
-            <a:spLocks noGrp="1"/>
+            <a:spLocks noGrp="1" noRot="1" noChangeAspect="1"/>
           </p:cNvSpPr>
           <p:nvPr>
             <p:ph type="sldImg" idx="2"/>
@@ -996,7 +907,7 @@
             <a:spLocks noGrp="1"/>
           </p:cNvSpPr>
           <p:nvPr>
-            <p:ph type="body" idx="3" sz="quarter"/>
+            <p:ph type="body" sz="quarter" idx="3"/>
           </p:nvPr>
         </p:nvSpPr>
         <p:spPr/>
@@ -1005,19 +916,47 @@
           <a:lstStyle/>
           <a:p>
             <a:r>
-              <a:t>~40 seconds</a:t>
-            </a:r>
-          </a:p>
-          <a:p/>
-          <a:p>
-            <a:r>
-              <a:t>Three layers. Frontend: Next.js 14, TypeScript, TailwindCSS, Framer Motion, and Three.js for the 3D robot. Backend: FastAPI with async routes for search, transcripts, chunking, vector storage, chat, agent, speech, and analytics. AI layer: LangChain tools, OpenAI GPT-4o-mini for chat and text-embedding-3-small for vectors, ChromaDB as the vector store, and Whisper as a fallback for videos without captions.</a:t>
-            </a:r>
-          </a:p>
-          <a:p/>
-          <a:p>
-            <a:r>
-              <a:t>There is also an observability layer: analytics tables, a dashboard, Prometheus metrics, and optional LangSmith tracing.</a:t>
+              <a:t>[55 sec] The architecture has three main layers.</a:t>
+            </a:r>
+          </a:p>
+          <a:p>
+            <a:endParaRPr/>
+          </a:p>
+          <a:p>
+            <a:r>
+              <a:t>Frontend: Next.js with TypeScript, Tailwind, Framer Motion, Embla carousel, and Three.js for the 3D assistant.</a:t>
+            </a:r>
+          </a:p>
+          <a:p>
+            <a:endParaRPr/>
+          </a:p>
+          <a:p>
+            <a:r>
+              <a:t>Backend: FastAPI with routes for search, transcripts, chunking, vector storage, chat, agent chat, speech, and evaluations.</a:t>
+            </a:r>
+          </a:p>
+          <a:p>
+            <a:endParaRPr/>
+          </a:p>
+          <a:p>
+            <a:r>
+              <a:t>AI and data layer: LangChain, OpenAI models, ChromaDB, Whisper fallback, and optional LangSmith tracing.</a:t>
+            </a:r>
+          </a:p>
+          <a:p>
+            <a:endParaRPr/>
+          </a:p>
+          <a:p>
+            <a:r>
+              <a:t>Everything runs with Docker Compose. There is also an observability layer: analytics events, RAG metrics, pipeline metrics, Prometheus metrics, and an /analytics dashboard.</a:t>
+            </a:r>
+          </a:p>
+          <a:p>
+            <a:endParaRPr/>
+          </a:p>
+          <a:p>
+            <a:r>
+              <a:t>KEY MESSAGE: Separated like a production app — UI, API, AI/data pipeline, and observability.</a:t>
             </a:r>
           </a:p>
         </p:txBody>
@@ -1029,7 +968,7 @@
             <a:spLocks noGrp="1"/>
           </p:cNvSpPr>
           <p:nvPr>
-            <p:ph type="sldNum" idx="5" sz="quarter"/>
+            <p:ph type="sldNum" sz="quarter" idx="5"/>
           </p:nvPr>
         </p:nvSpPr>
         <p:spPr/>
@@ -1043,7 +982,7 @@
 </file>
 
 <file path=ppt/notesSlides/notesSlide5.xml><?xml version="1.0" encoding="utf-8"?>
-<p:notes xmlns:a="http://schemas.openxmlformats.org/drawingml/2006/main" xmlns:p="http://schemas.openxmlformats.org/presentationml/2006/main" xmlns:r="http://schemas.openxmlformats.org/officeDocument/2006/relationships">
+<p:notes xmlns:a="http://schemas.openxmlformats.org/drawingml/2006/main" xmlns:r="http://schemas.openxmlformats.org/officeDocument/2006/relationships" xmlns:p="http://schemas.openxmlformats.org/presentationml/2006/main">
   <p:cSld>
     <p:spTree>
       <p:nvGrpSpPr>
@@ -1063,7 +1002,7 @@
         <p:nvSpPr>
           <p:cNvPr id="2" name="Slide Image Placeholder 1"/>
           <p:cNvSpPr>
-            <a:spLocks noGrp="1"/>
+            <a:spLocks noGrp="1" noRot="1" noChangeAspect="1"/>
           </p:cNvSpPr>
           <p:nvPr>
             <p:ph type="sldImg" idx="2"/>
@@ -1078,7 +1017,7 @@
             <a:spLocks noGrp="1"/>
           </p:cNvSpPr>
           <p:nvPr>
-            <p:ph type="body" idx="3" sz="quarter"/>
+            <p:ph type="body" sz="quarter" idx="3"/>
           </p:nvPr>
         </p:nvSpPr>
         <p:spPr/>
@@ -1087,19 +1026,47 @@
           <a:lstStyle/>
           <a:p>
             <a:r>
-              <a:t>~40 seconds</a:t>
-            </a:r>
-          </a:p>
-          <a:p/>
-          <a:p>
-            <a:r>
-              <a:t>When you click Prepare, the ingestion pipeline runs live. The YouTube Data API fetches the video metadata. youtube-transcript-api pulls the captions — no audio download needed in the normal flow. LangChain splits the transcript into overlapping chunks and keeps the timestamp attached to each one. OpenAI embeds each chunk and ChromaDB stores them for similarity search.</a:t>
-            </a:r>
-          </a:p>
-          <a:p/>
-          <a:p>
-            <a:r>
-              <a:t>The status stream on the right — metadata, transcript, chunking, embeddings, storage — is live WebSocket progress from the backend, not just decoration.</a:t>
+              <a:t>[55 sec] This is the most important backend flow.</a:t>
+            </a:r>
+          </a:p>
+          <a:p>
+            <a:endParaRPr/>
+          </a:p>
+          <a:p>
+            <a:r>
+              <a:t>When the user selects a video, the backend first gets metadata from the YouTube Data API. Then it tries to get the transcript using youtube-transcript-api — this was also the approach recommended by Carlos.</a:t>
+            </a:r>
+          </a:p>
+          <a:p>
+            <a:endParaRPr/>
+          </a:p>
+          <a:p>
+            <a:r>
+              <a:t>The transcript is split into chunks. Each chunk keeps timestamp metadata so the answer can cite exact moments later.</a:t>
+            </a:r>
+          </a:p>
+          <a:p>
+            <a:endParaRPr/>
+          </a:p>
+          <a:p>
+            <a:r>
+              <a:t>Then OpenAI embeddings are generated and stored in ChromaDB. After this step, the video is ready for RAG questions.</a:t>
+            </a:r>
+          </a:p>
+          <a:p>
+            <a:endParaRPr/>
+          </a:p>
+          <a:p>
+            <a:r>
+              <a:t>Whisper and yt-dlp exist only as a fallback if captions are unavailable. The normal flow does not download full videos.</a:t>
+            </a:r>
+          </a:p>
+          <a:p>
+            <a:endParaRPr/>
+          </a:p>
+          <a:p>
+            <a:r>
+              <a:t>KEY MESSAGE: Transcript first, audio fallback only when needed.</a:t>
             </a:r>
           </a:p>
         </p:txBody>
@@ -1111,7 +1078,7 @@
             <a:spLocks noGrp="1"/>
           </p:cNvSpPr>
           <p:nvPr>
-            <p:ph type="sldNum" idx="5" sz="quarter"/>
+            <p:ph type="sldNum" sz="quarter" idx="5"/>
           </p:nvPr>
         </p:nvSpPr>
         <p:spPr/>
@@ -1125,7 +1092,7 @@
 </file>
 
 <file path=ppt/notesSlides/notesSlide6.xml><?xml version="1.0" encoding="utf-8"?>
-<p:notes xmlns:a="http://schemas.openxmlformats.org/drawingml/2006/main" xmlns:p="http://schemas.openxmlformats.org/presentationml/2006/main" xmlns:r="http://schemas.openxmlformats.org/officeDocument/2006/relationships">
+<p:notes xmlns:a="http://schemas.openxmlformats.org/drawingml/2006/main" xmlns:r="http://schemas.openxmlformats.org/officeDocument/2006/relationships" xmlns:p="http://schemas.openxmlformats.org/presentationml/2006/main">
   <p:cSld>
     <p:spTree>
       <p:nvGrpSpPr>
@@ -1145,7 +1112,7 @@
         <p:nvSpPr>
           <p:cNvPr id="2" name="Slide Image Placeholder 1"/>
           <p:cNvSpPr>
-            <a:spLocks noGrp="1"/>
+            <a:spLocks noGrp="1" noRot="1" noChangeAspect="1"/>
           </p:cNvSpPr>
           <p:nvPr>
             <p:ph type="sldImg" idx="2"/>
@@ -1160,7 +1127,7 @@
             <a:spLocks noGrp="1"/>
           </p:cNvSpPr>
           <p:nvPr>
-            <p:ph type="body" idx="3" sz="quarter"/>
+            <p:ph type="body" sz="quarter" idx="3"/>
           </p:nvPr>
         </p:nvSpPr>
         <p:spPr/>
@@ -1169,25 +1136,126 @@
           <a:lstStyle/>
           <a:p>
             <a:r>
-              <a:t>~50 seconds</a:t>
-            </a:r>
-          </a:p>
-          <a:p/>
-          <a:p>
-            <a:r>
-              <a:t>The chat is not just a single prompt — it uses a real tool-calling agent. I built seven LangChain StructuredTools: search YouTube, extract transcript, chunk, store vectors, full ingest, retrieve context, and answer question.</a:t>
-            </a:r>
-          </a:p>
-          <a:p/>
-          <a:p>
-            <a:r>
-              <a:t>The agent decides which tools to call based on the question. For a chat question it calls retrieve_context then answer_question. For a new video request it chains through the full ingestion flow automatically.</a:t>
-            </a:r>
-          </a:p>
-          <a:p/>
-          <a:p>
-            <a:r>
-              <a:t>Two guardrails are enforced: answers must come from the transcript only, and off-topic questions must be refused. ConversationMemoryService keeps session history so follow-up questions stay coherent.</a:t>
+              <a:rPr dirty="0"/>
+              <a:t>[55 sec] To match the tool requirement, I implemented a </a:t>
+            </a:r>
+            <a:r>
+              <a:rPr dirty="0" err="1"/>
+              <a:t>LangChain</a:t>
+            </a:r>
+            <a:r>
+              <a:rPr dirty="0"/>
+              <a:t> tools layer.</a:t>
+            </a:r>
+          </a:p>
+          <a:p>
+            <a:endParaRPr dirty="0"/>
+          </a:p>
+          <a:p>
+            <a:r>
+              <a:rPr dirty="0"/>
+              <a:t>Each tool wraps an existing backend service:</a:t>
+            </a:r>
+          </a:p>
+          <a:p>
+            <a:r>
+              <a:rPr dirty="0"/>
+              <a:t>- </a:t>
+            </a:r>
+            <a:r>
+              <a:rPr dirty="0" err="1"/>
+              <a:t>search_youtube_videos</a:t>
+            </a:r>
+            <a:endParaRPr dirty="0"/>
+          </a:p>
+          <a:p>
+            <a:r>
+              <a:rPr dirty="0"/>
+              <a:t>- </a:t>
+            </a:r>
+            <a:r>
+              <a:rPr dirty="0" err="1"/>
+              <a:t>extract_transcript</a:t>
+            </a:r>
+            <a:endParaRPr dirty="0"/>
+          </a:p>
+          <a:p>
+            <a:r>
+              <a:rPr dirty="0"/>
+              <a:t>- </a:t>
+            </a:r>
+            <a:r>
+              <a:rPr dirty="0" err="1"/>
+              <a:t>chunk_transcript</a:t>
+            </a:r>
+            <a:endParaRPr dirty="0"/>
+          </a:p>
+          <a:p>
+            <a:r>
+              <a:rPr dirty="0"/>
+              <a:t>- </a:t>
+            </a:r>
+            <a:r>
+              <a:rPr dirty="0" err="1"/>
+              <a:t>store_video_vectors</a:t>
+            </a:r>
+            <a:endParaRPr dirty="0"/>
+          </a:p>
+          <a:p>
+            <a:r>
+              <a:rPr dirty="0"/>
+              <a:t>- </a:t>
+            </a:r>
+            <a:r>
+              <a:rPr dirty="0" err="1"/>
+              <a:t>retrieve_context</a:t>
+            </a:r>
+            <a:endParaRPr dirty="0"/>
+          </a:p>
+          <a:p>
+            <a:r>
+              <a:rPr dirty="0"/>
+              <a:t>- </a:t>
+            </a:r>
+            <a:r>
+              <a:rPr dirty="0" err="1"/>
+              <a:t>answer_question</a:t>
+            </a:r>
+            <a:endParaRPr dirty="0"/>
+          </a:p>
+          <a:p>
+            <a:endParaRPr dirty="0"/>
+          </a:p>
+          <a:p>
+            <a:r>
+              <a:rPr dirty="0"/>
+              <a:t>The </a:t>
+            </a:r>
+            <a:r>
+              <a:rPr dirty="0" err="1"/>
+              <a:t>AgentService</a:t>
+            </a:r>
+            <a:r>
+              <a:rPr dirty="0"/>
+              <a:t> binds these tools to the LLM. So the system is not just one prompt — it can decide which tool is needed and return the final answer with citations and the session ID.</a:t>
+            </a:r>
+          </a:p>
+          <a:p>
+            <a:endParaRPr dirty="0"/>
+          </a:p>
+          <a:p>
+            <a:r>
+              <a:rPr dirty="0"/>
+              <a:t>There is also memory, so follow-up questions can use the previous conversation.</a:t>
+            </a:r>
+          </a:p>
+          <a:p>
+            <a:endParaRPr dirty="0"/>
+          </a:p>
+          <a:p>
+            <a:r>
+              <a:rPr dirty="0"/>
+              <a:t>KEY MESSAGE: This directly covers the "LLM with tools and memory" requirement.</a:t>
             </a:r>
           </a:p>
         </p:txBody>
@@ -1199,7 +1267,7 @@
             <a:spLocks noGrp="1"/>
           </p:cNvSpPr>
           <p:nvPr>
-            <p:ph type="sldNum" idx="5" sz="quarter"/>
+            <p:ph type="sldNum" sz="quarter" idx="5"/>
           </p:nvPr>
         </p:nvSpPr>
         <p:spPr/>
@@ -1213,7 +1281,7 @@
 </file>
 
 <file path=ppt/notesSlides/notesSlide7.xml><?xml version="1.0" encoding="utf-8"?>
-<p:notes xmlns:a="http://schemas.openxmlformats.org/drawingml/2006/main" xmlns:p="http://schemas.openxmlformats.org/presentationml/2006/main" xmlns:r="http://schemas.openxmlformats.org/officeDocument/2006/relationships">
+<p:notes xmlns:a="http://schemas.openxmlformats.org/drawingml/2006/main" xmlns:r="http://schemas.openxmlformats.org/officeDocument/2006/relationships" xmlns:p="http://schemas.openxmlformats.org/presentationml/2006/main">
   <p:cSld>
     <p:spTree>
       <p:nvGrpSpPr>
@@ -1233,7 +1301,7 @@
         <p:nvSpPr>
           <p:cNvPr id="2" name="Slide Image Placeholder 1"/>
           <p:cNvSpPr>
-            <a:spLocks noGrp="1"/>
+            <a:spLocks noGrp="1" noRot="1" noChangeAspect="1"/>
           </p:cNvSpPr>
           <p:nvPr>
             <p:ph type="sldImg" idx="2"/>
@@ -1248,7 +1316,7 @@
             <a:spLocks noGrp="1"/>
           </p:cNvSpPr>
           <p:nvPr>
-            <p:ph type="body" idx="3" sz="quarter"/>
+            <p:ph type="body" sz="quarter" idx="3"/>
           </p:nvPr>
         </p:nvSpPr>
         <p:spPr/>
@@ -1257,19 +1325,61 @@
           <a:lstStyle/>
           <a:p>
             <a:r>
-              <a:t>~45 seconds</a:t>
-            </a:r>
-          </a:p>
-          <a:p/>
-          <a:p>
-            <a:r>
-              <a:t>The RAG pipeline is four steps. Retrieve: ChromaDB finds the most relevant transcript chunks by semantic similarity. Inject: the prompt receives those chunks, the conversation memory, and strict grounding rules. Generate: GPT-4o-mini writes an answer using only what is in the context. Cite: the response includes timestamp chips that link to the exact moment in the video.</a:t>
-            </a:r>
-          </a:p>
-          <a:p/>
-          <a:p>
-            <a:r>
-              <a:t>If the answer is not in the transcript, the system says it cannot answer from this video. That refusal is the core anti-hallucination mechanism.</a:t>
+              <a:rPr dirty="0"/>
+              <a:t>[45 sec] The RAG flow has four steps.</a:t>
+            </a:r>
+          </a:p>
+          <a:p>
+            <a:endParaRPr dirty="0"/>
+          </a:p>
+          <a:p>
+            <a:r>
+              <a:rPr dirty="0"/>
+              <a:t>1. The user question retrieves the most relevant transcript chunks from </a:t>
+            </a:r>
+            <a:r>
+              <a:rPr dirty="0" err="1"/>
+              <a:t>ChromaDB</a:t>
+            </a:r>
+            <a:r>
+              <a:rPr dirty="0"/>
+              <a:t>.</a:t>
+            </a:r>
+          </a:p>
+          <a:p>
+            <a:r>
+              <a:rPr dirty="0"/>
+              <a:t>2. Those chunks, the memory, and the rules are injected into the prompt.</a:t>
+            </a:r>
+          </a:p>
+          <a:p>
+            <a:r>
+              <a:rPr dirty="0"/>
+              <a:t>3. The model writes the answer only from that context.</a:t>
+            </a:r>
+          </a:p>
+          <a:p>
+            <a:r>
+              <a:rPr dirty="0"/>
+              <a:t>4. The UI shows timestamp citations.</a:t>
+            </a:r>
+          </a:p>
+          <a:p>
+            <a:endParaRPr dirty="0"/>
+          </a:p>
+          <a:p>
+            <a:r>
+              <a:rPr dirty="0"/>
+              <a:t>If the answer is not in the transcript, the assistant says it cannot answer from the video. This is the main anti-hallucination rule.</a:t>
+            </a:r>
+          </a:p>
+          <a:p>
+            <a:endParaRPr dirty="0"/>
+          </a:p>
+          <a:p>
+            <a:r>
+              <a:rPr dirty="0"/>
+              <a:t>KEY MESSAGE: Retrieval controls what the model is allowed to answer.</a:t>
             </a:r>
           </a:p>
         </p:txBody>
@@ -1281,7 +1391,7 @@
             <a:spLocks noGrp="1"/>
           </p:cNvSpPr>
           <p:nvPr>
-            <p:ph type="sldNum" idx="5" sz="quarter"/>
+            <p:ph type="sldNum" sz="quarter" idx="5"/>
           </p:nvPr>
         </p:nvSpPr>
         <p:spPr/>
@@ -1295,7 +1405,7 @@
 </file>
 
 <file path=ppt/notesSlides/notesSlide8.xml><?xml version="1.0" encoding="utf-8"?>
-<p:notes xmlns:a="http://schemas.openxmlformats.org/drawingml/2006/main" xmlns:p="http://schemas.openxmlformats.org/presentationml/2006/main" xmlns:r="http://schemas.openxmlformats.org/officeDocument/2006/relationships">
+<p:notes xmlns:a="http://schemas.openxmlformats.org/drawingml/2006/main" xmlns:r="http://schemas.openxmlformats.org/officeDocument/2006/relationships" xmlns:p="http://schemas.openxmlformats.org/presentationml/2006/main">
   <p:cSld>
     <p:spTree>
       <p:nvGrpSpPr>
@@ -1315,7 +1425,7 @@
         <p:nvSpPr>
           <p:cNvPr id="2" name="Slide Image Placeholder 1"/>
           <p:cNvSpPr>
-            <a:spLocks noGrp="1"/>
+            <a:spLocks noGrp="1" noRot="1" noChangeAspect="1"/>
           </p:cNvSpPr>
           <p:nvPr>
             <p:ph type="sldImg" idx="2"/>
@@ -1330,7 +1440,7 @@
             <a:spLocks noGrp="1"/>
           </p:cNvSpPr>
           <p:nvPr>
-            <p:ph type="body" idx="3" sz="quarter"/>
+            <p:ph type="body" sz="quarter" idx="3"/>
           </p:nvPr>
         </p:nvSpPr>
         <p:spPr/>
@@ -1339,13 +1449,35 @@
           <a:lstStyle/>
           <a:p>
             <a:r>
-              <a:t>~30 seconds</a:t>
-            </a:r>
-          </a:p>
-          <a:p/>
-          <a:p>
-            <a:r>
-              <a:t>The UI is designed to feel like a real product. Voice search tries the browser Web Speech API first, and automatically falls back to MediaRecorder plus Whisper if it fails. The 3D robot moves through the journey stages and speaks short guidance at each step. Accessibility is built in: semantic labels, visible focus states, reduced-motion support, and screen-reader status messages.</a:t>
+              <a:rPr dirty="0"/>
+              <a:t>[35 sec] I added optional features to make the project feel more complete.</a:t>
+            </a:r>
+          </a:p>
+          <a:p>
+            <a:endParaRPr dirty="0"/>
+          </a:p>
+          <a:p>
+            <a:r>
+              <a:rPr dirty="0"/>
+              <a:t>Voice search uses the browser Web Speech API first. If that fails, the app records audio and sends it to Whisper for transcription.</a:t>
+            </a:r>
+          </a:p>
+          <a:p>
+            <a:endParaRPr dirty="0"/>
+          </a:p>
+          <a:p>
+            <a:r>
+              <a:rPr dirty="0"/>
+              <a:t>There is also text-to-speech for AI answers, a 3D assistant scene, animated loading states, responsive layouts, and accessibility improvements — labels, focus states, and reduced-motion support.</a:t>
+            </a:r>
+          </a:p>
+          <a:p>
+            <a:endParaRPr dirty="0"/>
+          </a:p>
+          <a:p>
+            <a:r>
+              <a:rPr dirty="0"/>
+              <a:t>KEY MESSAGE: Optional features support the learning experience, but the core is still RAG.</a:t>
             </a:r>
           </a:p>
         </p:txBody>
@@ -1357,7 +1489,7 @@
             <a:spLocks noGrp="1"/>
           </p:cNvSpPr>
           <p:nvPr>
-            <p:ph type="sldNum" idx="5" sz="quarter"/>
+            <p:ph type="sldNum" sz="quarter" idx="5"/>
           </p:nvPr>
         </p:nvSpPr>
         <p:spPr/>
@@ -1371,7 +1503,7 @@
 </file>
 
 <file path=ppt/notesSlides/notesSlide9.xml><?xml version="1.0" encoding="utf-8"?>
-<p:notes xmlns:a="http://schemas.openxmlformats.org/drawingml/2006/main" xmlns:p="http://schemas.openxmlformats.org/presentationml/2006/main" xmlns:r="http://schemas.openxmlformats.org/officeDocument/2006/relationships">
+<p:notes xmlns:a="http://schemas.openxmlformats.org/drawingml/2006/main" xmlns:r="http://schemas.openxmlformats.org/officeDocument/2006/relationships" xmlns:p="http://schemas.openxmlformats.org/presentationml/2006/main">
   <p:cSld>
     <p:spTree>
       <p:nvGrpSpPr>
@@ -1391,7 +1523,7 @@
         <p:nvSpPr>
           <p:cNvPr id="2" name="Slide Image Placeholder 1"/>
           <p:cNvSpPr>
-            <a:spLocks noGrp="1"/>
+            <a:spLocks noGrp="1" noRot="1" noChangeAspect="1"/>
           </p:cNvSpPr>
           <p:nvPr>
             <p:ph type="sldImg" idx="2"/>
@@ -1406,7 +1538,7 @@
             <a:spLocks noGrp="1"/>
           </p:cNvSpPr>
           <p:nvPr>
-            <p:ph type="body" idx="3" sz="quarter"/>
+            <p:ph type="body" sz="quarter" idx="3"/>
           </p:nvPr>
         </p:nvSpPr>
         <p:spPr/>
@@ -1415,19 +1547,39 @@
           <a:lstStyle/>
           <a:p>
             <a:r>
-              <a:t>~35 seconds</a:t>
-            </a:r>
-          </a:p>
-          <a:p/>
-          <a:p>
-            <a:r>
-              <a:t>I added analytics so the app can be observed like a production AI product. The frontend records product and UX events such as searches, selected videos, voice search, prompt clicks, and timestamp clicks. The backend records RAG latency, retrieved chunks, citation coverage, transcript time, embedding time, vector query time, and WebSocket failures.</a:t>
-            </a:r>
-          </a:p>
-          <a:p/>
-          <a:p>
-            <a:r>
-              <a:t>There are two views: the /analytics dashboard for product and AI observability, and /metrics for Prometheus-style operational metrics. LangSmith is still available for deep chain traces.</a:t>
+              <a:t>[35 sec] I added an analytics and observability system so the app is not only functional, but measurable.</a:t>
+            </a:r>
+          </a:p>
+          <a:p>
+            <a:endParaRPr/>
+          </a:p>
+          <a:p>
+            <a:r>
+              <a:t>Frontend tracks: searches, video selections, voice search, carousel use, suggested prompts, transcript opens, and timestamp clicks.</a:t>
+            </a:r>
+          </a:p>
+          <a:p>
+            <a:endParaRPr/>
+          </a:p>
+          <a:p>
+            <a:r>
+              <a:t>Backend tracks RAG metrics: retrieval latency, generation latency, chunks retrieved, token estimates, citation coverage, and hallucination warnings.</a:t>
+            </a:r>
+          </a:p>
+          <a:p>
+            <a:endParaRPr/>
+          </a:p>
+          <a:p>
+            <a:r>
+              <a:t>There is a dashboard at /analytics and Prometheus metrics at /metrics.</a:t>
+            </a:r>
+          </a:p>
+          <a:p>
+            <a:endParaRPr/>
+          </a:p>
+          <a:p>
+            <a:r>
+              <a:t>KEY MESSAGE: The project can explain what users do, how the RAG system behaves, and where the pipeline is slow.</a:t>
             </a:r>
           </a:p>
         </p:txBody>
@@ -1439,7 +1591,7 @@
             <a:spLocks noGrp="1"/>
           </p:cNvSpPr>
           <p:nvPr>
-            <p:ph type="sldNum" idx="5" sz="quarter"/>
+            <p:ph type="sldNum" sz="quarter" idx="5"/>
           </p:nvPr>
         </p:nvSpPr>
         <p:spPr/>
@@ -1490,10 +1642,9 @@
           <a:lstStyle/>
           <a:p>
             <a:r>
-              <a:rPr lang="en-US" smtClean="0"/>
+              <a:rPr lang="en-US"/>
               <a:t>Click to edit Master title style</a:t>
             </a:r>
-            <a:endParaRPr lang="en-US"/>
           </a:p>
         </p:txBody>
       </p:sp>
@@ -1609,10 +1760,9 @@
           </a:lstStyle>
           <a:p>
             <a:r>
-              <a:rPr lang="en-US" smtClean="0"/>
+              <a:rPr lang="en-US"/>
               <a:t>Click to edit Master subtitle style</a:t>
             </a:r>
-            <a:endParaRPr lang="en-US"/>
           </a:p>
         </p:txBody>
       </p:sp>
@@ -1633,7 +1783,7 @@
           <a:p>
             <a:fld id="{5BCAD085-E8A6-8845-BD4E-CB4CCA059FC4}" type="datetimeFigureOut">
               <a:rPr lang="en-US" smtClean="0"/>
-              <a:t>1/27/13</a:t>
+              <a:t>5/27/2026</a:t>
             </a:fld>
             <a:endParaRPr lang="en-US"/>
           </a:p>
@@ -1727,10 +1877,9 @@
           <a:lstStyle/>
           <a:p>
             <a:r>
-              <a:rPr lang="en-US" smtClean="0"/>
+              <a:rPr lang="en-US"/>
               <a:t>Click to edit Master title style</a:t>
             </a:r>
-            <a:endParaRPr lang="en-US"/>
           </a:p>
         </p:txBody>
       </p:sp>
@@ -1751,38 +1900,37 @@
           <a:p>
             <a:pPr lvl="0"/>
             <a:r>
-              <a:rPr lang="en-US" smtClean="0"/>
+              <a:rPr lang="en-US"/>
               <a:t>Click to edit Master text styles</a:t>
             </a:r>
           </a:p>
           <a:p>
             <a:pPr lvl="1"/>
             <a:r>
-              <a:rPr lang="en-US" smtClean="0"/>
+              <a:rPr lang="en-US"/>
               <a:t>Second level</a:t>
             </a:r>
           </a:p>
           <a:p>
             <a:pPr lvl="2"/>
             <a:r>
-              <a:rPr lang="en-US" smtClean="0"/>
+              <a:rPr lang="en-US"/>
               <a:t>Third level</a:t>
             </a:r>
           </a:p>
           <a:p>
             <a:pPr lvl="3"/>
             <a:r>
-              <a:rPr lang="en-US" smtClean="0"/>
+              <a:rPr lang="en-US"/>
               <a:t>Fourth level</a:t>
             </a:r>
           </a:p>
           <a:p>
             <a:pPr lvl="4"/>
             <a:r>
-              <a:rPr lang="en-US" smtClean="0"/>
+              <a:rPr lang="en-US"/>
               <a:t>Fifth level</a:t>
             </a:r>
-            <a:endParaRPr lang="en-US"/>
           </a:p>
         </p:txBody>
       </p:sp>
@@ -1803,7 +1951,7 @@
           <a:p>
             <a:fld id="{5BCAD085-E8A6-8845-BD4E-CB4CCA059FC4}" type="datetimeFigureOut">
               <a:rPr lang="en-US" smtClean="0"/>
-              <a:t>1/27/13</a:t>
+              <a:t>5/27/2026</a:t>
             </a:fld>
             <a:endParaRPr lang="en-US"/>
           </a:p>
@@ -1902,10 +2050,9 @@
           <a:lstStyle/>
           <a:p>
             <a:r>
-              <a:rPr lang="en-US" smtClean="0"/>
+              <a:rPr lang="en-US"/>
               <a:t>Click to edit Master title style</a:t>
             </a:r>
-            <a:endParaRPr lang="en-US"/>
           </a:p>
         </p:txBody>
       </p:sp>
@@ -1931,38 +2078,37 @@
           <a:p>
             <a:pPr lvl="0"/>
             <a:r>
-              <a:rPr lang="en-US" smtClean="0"/>
+              <a:rPr lang="en-US"/>
               <a:t>Click to edit Master text styles</a:t>
             </a:r>
           </a:p>
           <a:p>
             <a:pPr lvl="1"/>
             <a:r>
-              <a:rPr lang="en-US" smtClean="0"/>
+              <a:rPr lang="en-US"/>
               <a:t>Second level</a:t>
             </a:r>
           </a:p>
           <a:p>
             <a:pPr lvl="2"/>
             <a:r>
-              <a:rPr lang="en-US" smtClean="0"/>
+              <a:rPr lang="en-US"/>
               <a:t>Third level</a:t>
             </a:r>
           </a:p>
           <a:p>
             <a:pPr lvl="3"/>
             <a:r>
-              <a:rPr lang="en-US" smtClean="0"/>
+              <a:rPr lang="en-US"/>
               <a:t>Fourth level</a:t>
             </a:r>
           </a:p>
           <a:p>
             <a:pPr lvl="4"/>
             <a:r>
-              <a:rPr lang="en-US" smtClean="0"/>
+              <a:rPr lang="en-US"/>
               <a:t>Fifth level</a:t>
             </a:r>
-            <a:endParaRPr lang="en-US"/>
           </a:p>
         </p:txBody>
       </p:sp>
@@ -1983,7 +2129,7 @@
           <a:p>
             <a:fld id="{5BCAD085-E8A6-8845-BD4E-CB4CCA059FC4}" type="datetimeFigureOut">
               <a:rPr lang="en-US" smtClean="0"/>
-              <a:t>1/27/13</a:t>
+              <a:t>5/27/2026</a:t>
             </a:fld>
             <a:endParaRPr lang="en-US"/>
           </a:p>
@@ -2077,10 +2223,9 @@
           <a:lstStyle/>
           <a:p>
             <a:r>
-              <a:rPr lang="en-US" smtClean="0"/>
+              <a:rPr lang="en-US"/>
               <a:t>Click to edit Master title style</a:t>
             </a:r>
-            <a:endParaRPr lang="en-US"/>
           </a:p>
         </p:txBody>
       </p:sp>
@@ -2101,38 +2246,37 @@
           <a:p>
             <a:pPr lvl="0"/>
             <a:r>
-              <a:rPr lang="en-US" smtClean="0"/>
+              <a:rPr lang="en-US"/>
               <a:t>Click to edit Master text styles</a:t>
             </a:r>
           </a:p>
           <a:p>
             <a:pPr lvl="1"/>
             <a:r>
-              <a:rPr lang="en-US" smtClean="0"/>
+              <a:rPr lang="en-US"/>
               <a:t>Second level</a:t>
             </a:r>
           </a:p>
           <a:p>
             <a:pPr lvl="2"/>
             <a:r>
-              <a:rPr lang="en-US" smtClean="0"/>
+              <a:rPr lang="en-US"/>
               <a:t>Third level</a:t>
             </a:r>
           </a:p>
           <a:p>
             <a:pPr lvl="3"/>
             <a:r>
-              <a:rPr lang="en-US" smtClean="0"/>
+              <a:rPr lang="en-US"/>
               <a:t>Fourth level</a:t>
             </a:r>
           </a:p>
           <a:p>
             <a:pPr lvl="4"/>
             <a:r>
-              <a:rPr lang="en-US" smtClean="0"/>
+              <a:rPr lang="en-US"/>
               <a:t>Fifth level</a:t>
             </a:r>
-            <a:endParaRPr lang="en-US"/>
           </a:p>
         </p:txBody>
       </p:sp>
@@ -2153,7 +2297,7 @@
           <a:p>
             <a:fld id="{5BCAD085-E8A6-8845-BD4E-CB4CCA059FC4}" type="datetimeFigureOut">
               <a:rPr lang="en-US" smtClean="0"/>
-              <a:t>1/27/13</a:t>
+              <a:t>5/27/2026</a:t>
             </a:fld>
             <a:endParaRPr lang="en-US"/>
           </a:p>
@@ -2256,10 +2400,9 @@
           </a:lstStyle>
           <a:p>
             <a:r>
-              <a:rPr lang="en-US" smtClean="0"/>
+              <a:rPr lang="en-US"/>
               <a:t>Click to edit Master title style</a:t>
             </a:r>
-            <a:endParaRPr lang="en-US"/>
           </a:p>
         </p:txBody>
       </p:sp>
@@ -2376,7 +2519,7 @@
           <a:p>
             <a:pPr lvl="0"/>
             <a:r>
-              <a:rPr lang="en-US" smtClean="0"/>
+              <a:rPr lang="en-US"/>
               <a:t>Click to edit Master text styles</a:t>
             </a:r>
           </a:p>
@@ -2399,7 +2542,7 @@
           <a:p>
             <a:fld id="{5BCAD085-E8A6-8845-BD4E-CB4CCA059FC4}" type="datetimeFigureOut">
               <a:rPr lang="en-US" smtClean="0"/>
-              <a:t>1/27/13</a:t>
+              <a:t>5/27/2026</a:t>
             </a:fld>
             <a:endParaRPr lang="en-US"/>
           </a:p>
@@ -2493,10 +2636,9 @@
           <a:lstStyle/>
           <a:p>
             <a:r>
-              <a:rPr lang="en-US" smtClean="0"/>
+              <a:rPr lang="en-US"/>
               <a:t>Click to edit Master title style</a:t>
             </a:r>
-            <a:endParaRPr lang="en-US"/>
           </a:p>
         </p:txBody>
       </p:sp>
@@ -2550,38 +2692,37 @@
           <a:p>
             <a:pPr lvl="0"/>
             <a:r>
-              <a:rPr lang="en-US" smtClean="0"/>
+              <a:rPr lang="en-US"/>
               <a:t>Click to edit Master text styles</a:t>
             </a:r>
           </a:p>
           <a:p>
             <a:pPr lvl="1"/>
             <a:r>
-              <a:rPr lang="en-US" smtClean="0"/>
+              <a:rPr lang="en-US"/>
               <a:t>Second level</a:t>
             </a:r>
           </a:p>
           <a:p>
             <a:pPr lvl="2"/>
             <a:r>
-              <a:rPr lang="en-US" smtClean="0"/>
+              <a:rPr lang="en-US"/>
               <a:t>Third level</a:t>
             </a:r>
           </a:p>
           <a:p>
             <a:pPr lvl="3"/>
             <a:r>
-              <a:rPr lang="en-US" smtClean="0"/>
+              <a:rPr lang="en-US"/>
               <a:t>Fourth level</a:t>
             </a:r>
           </a:p>
           <a:p>
             <a:pPr lvl="4"/>
             <a:r>
-              <a:rPr lang="en-US" smtClean="0"/>
+              <a:rPr lang="en-US"/>
               <a:t>Fifth level</a:t>
             </a:r>
-            <a:endParaRPr lang="en-US"/>
           </a:p>
         </p:txBody>
       </p:sp>
@@ -2635,38 +2776,37 @@
           <a:p>
             <a:pPr lvl="0"/>
             <a:r>
-              <a:rPr lang="en-US" smtClean="0"/>
+              <a:rPr lang="en-US"/>
               <a:t>Click to edit Master text styles</a:t>
             </a:r>
           </a:p>
           <a:p>
             <a:pPr lvl="1"/>
             <a:r>
-              <a:rPr lang="en-US" smtClean="0"/>
+              <a:rPr lang="en-US"/>
               <a:t>Second level</a:t>
             </a:r>
           </a:p>
           <a:p>
             <a:pPr lvl="2"/>
             <a:r>
-              <a:rPr lang="en-US" smtClean="0"/>
+              <a:rPr lang="en-US"/>
               <a:t>Third level</a:t>
             </a:r>
           </a:p>
           <a:p>
             <a:pPr lvl="3"/>
             <a:r>
-              <a:rPr lang="en-US" smtClean="0"/>
+              <a:rPr lang="en-US"/>
               <a:t>Fourth level</a:t>
             </a:r>
           </a:p>
           <a:p>
             <a:pPr lvl="4"/>
             <a:r>
-              <a:rPr lang="en-US" smtClean="0"/>
+              <a:rPr lang="en-US"/>
               <a:t>Fifth level</a:t>
             </a:r>
-            <a:endParaRPr lang="en-US"/>
           </a:p>
         </p:txBody>
       </p:sp>
@@ -2687,7 +2827,7 @@
           <a:p>
             <a:fld id="{5BCAD085-E8A6-8845-BD4E-CB4CCA059FC4}" type="datetimeFigureOut">
               <a:rPr lang="en-US" smtClean="0"/>
-              <a:t>1/27/13</a:t>
+              <a:t>5/27/2026</a:t>
             </a:fld>
             <a:endParaRPr lang="en-US"/>
           </a:p>
@@ -2785,10 +2925,9 @@
           </a:lstStyle>
           <a:p>
             <a:r>
-              <a:rPr lang="en-US" smtClean="0"/>
+              <a:rPr lang="en-US"/>
               <a:t>Click to edit Master title style</a:t>
             </a:r>
-            <a:endParaRPr lang="en-US"/>
           </a:p>
         </p:txBody>
       </p:sp>
@@ -2851,7 +2990,7 @@
           <a:p>
             <a:pPr lvl="0"/>
             <a:r>
-              <a:rPr lang="en-US" smtClean="0"/>
+              <a:rPr lang="en-US"/>
               <a:t>Click to edit Master text styles</a:t>
             </a:r>
           </a:p>
@@ -2907,38 +3046,37 @@
           <a:p>
             <a:pPr lvl="0"/>
             <a:r>
-              <a:rPr lang="en-US" smtClean="0"/>
+              <a:rPr lang="en-US"/>
               <a:t>Click to edit Master text styles</a:t>
             </a:r>
           </a:p>
           <a:p>
             <a:pPr lvl="1"/>
             <a:r>
-              <a:rPr lang="en-US" smtClean="0"/>
+              <a:rPr lang="en-US"/>
               <a:t>Second level</a:t>
             </a:r>
           </a:p>
           <a:p>
             <a:pPr lvl="2"/>
             <a:r>
-              <a:rPr lang="en-US" smtClean="0"/>
+              <a:rPr lang="en-US"/>
               <a:t>Third level</a:t>
             </a:r>
           </a:p>
           <a:p>
             <a:pPr lvl="3"/>
             <a:r>
-              <a:rPr lang="en-US" smtClean="0"/>
+              <a:rPr lang="en-US"/>
               <a:t>Fourth level</a:t>
             </a:r>
           </a:p>
           <a:p>
             <a:pPr lvl="4"/>
             <a:r>
-              <a:rPr lang="en-US" smtClean="0"/>
+              <a:rPr lang="en-US"/>
               <a:t>Fifth level</a:t>
             </a:r>
-            <a:endParaRPr lang="en-US"/>
           </a:p>
         </p:txBody>
       </p:sp>
@@ -3001,7 +3139,7 @@
           <a:p>
             <a:pPr lvl="0"/>
             <a:r>
-              <a:rPr lang="en-US" smtClean="0"/>
+              <a:rPr lang="en-US"/>
               <a:t>Click to edit Master text styles</a:t>
             </a:r>
           </a:p>
@@ -3057,38 +3195,37 @@
           <a:p>
             <a:pPr lvl="0"/>
             <a:r>
-              <a:rPr lang="en-US" smtClean="0"/>
+              <a:rPr lang="en-US"/>
               <a:t>Click to edit Master text styles</a:t>
             </a:r>
           </a:p>
           <a:p>
             <a:pPr lvl="1"/>
             <a:r>
-              <a:rPr lang="en-US" smtClean="0"/>
+              <a:rPr lang="en-US"/>
               <a:t>Second level</a:t>
             </a:r>
           </a:p>
           <a:p>
             <a:pPr lvl="2"/>
             <a:r>
-              <a:rPr lang="en-US" smtClean="0"/>
+              <a:rPr lang="en-US"/>
               <a:t>Third level</a:t>
             </a:r>
           </a:p>
           <a:p>
             <a:pPr lvl="3"/>
             <a:r>
-              <a:rPr lang="en-US" smtClean="0"/>
+              <a:rPr lang="en-US"/>
               <a:t>Fourth level</a:t>
             </a:r>
           </a:p>
           <a:p>
             <a:pPr lvl="4"/>
             <a:r>
-              <a:rPr lang="en-US" smtClean="0"/>
+              <a:rPr lang="en-US"/>
               <a:t>Fifth level</a:t>
             </a:r>
-            <a:endParaRPr lang="en-US"/>
           </a:p>
         </p:txBody>
       </p:sp>
@@ -3109,7 +3246,7 @@
           <a:p>
             <a:fld id="{5BCAD085-E8A6-8845-BD4E-CB4CCA059FC4}" type="datetimeFigureOut">
               <a:rPr lang="en-US" smtClean="0"/>
-              <a:t>1/27/13</a:t>
+              <a:t>5/27/2026</a:t>
             </a:fld>
             <a:endParaRPr lang="en-US"/>
           </a:p>
@@ -3203,10 +3340,9 @@
           <a:lstStyle/>
           <a:p>
             <a:r>
-              <a:rPr lang="en-US" smtClean="0"/>
+              <a:rPr lang="en-US"/>
               <a:t>Click to edit Master title style</a:t>
             </a:r>
-            <a:endParaRPr lang="en-US"/>
           </a:p>
         </p:txBody>
       </p:sp>
@@ -3227,7 +3363,7 @@
           <a:p>
             <a:fld id="{5BCAD085-E8A6-8845-BD4E-CB4CCA059FC4}" type="datetimeFigureOut">
               <a:rPr lang="en-US" smtClean="0"/>
-              <a:t>1/27/13</a:t>
+              <a:t>5/27/2026</a:t>
             </a:fld>
             <a:endParaRPr lang="en-US"/>
           </a:p>
@@ -3322,7 +3458,7 @@
           <a:p>
             <a:fld id="{5BCAD085-E8A6-8845-BD4E-CB4CCA059FC4}" type="datetimeFigureOut">
               <a:rPr lang="en-US" smtClean="0"/>
-              <a:t>1/27/13</a:t>
+              <a:t>5/27/2026</a:t>
             </a:fld>
             <a:endParaRPr lang="en-US"/>
           </a:p>
@@ -3425,10 +3561,9 @@
           </a:lstStyle>
           <a:p>
             <a:r>
-              <a:rPr lang="en-US" smtClean="0"/>
+              <a:rPr lang="en-US"/>
               <a:t>Click to edit Master title style</a:t>
             </a:r>
-            <a:endParaRPr lang="en-US"/>
           </a:p>
         </p:txBody>
       </p:sp>
@@ -3482,38 +3617,37 @@
           <a:p>
             <a:pPr lvl="0"/>
             <a:r>
-              <a:rPr lang="en-US" smtClean="0"/>
+              <a:rPr lang="en-US"/>
               <a:t>Click to edit Master text styles</a:t>
             </a:r>
           </a:p>
           <a:p>
             <a:pPr lvl="1"/>
             <a:r>
-              <a:rPr lang="en-US" smtClean="0"/>
+              <a:rPr lang="en-US"/>
               <a:t>Second level</a:t>
             </a:r>
           </a:p>
           <a:p>
             <a:pPr lvl="2"/>
             <a:r>
-              <a:rPr lang="en-US" smtClean="0"/>
+              <a:rPr lang="en-US"/>
               <a:t>Third level</a:t>
             </a:r>
           </a:p>
           <a:p>
             <a:pPr lvl="3"/>
             <a:r>
-              <a:rPr lang="en-US" smtClean="0"/>
+              <a:rPr lang="en-US"/>
               <a:t>Fourth level</a:t>
             </a:r>
           </a:p>
           <a:p>
             <a:pPr lvl="4"/>
             <a:r>
-              <a:rPr lang="en-US" smtClean="0"/>
+              <a:rPr lang="en-US"/>
               <a:t>Fifth level</a:t>
             </a:r>
-            <a:endParaRPr lang="en-US"/>
           </a:p>
         </p:txBody>
       </p:sp>
@@ -3576,7 +3710,7 @@
           <a:p>
             <a:pPr lvl="0"/>
             <a:r>
-              <a:rPr lang="en-US" smtClean="0"/>
+              <a:rPr lang="en-US"/>
               <a:t>Click to edit Master text styles</a:t>
             </a:r>
           </a:p>
@@ -3599,7 +3733,7 @@
           <a:p>
             <a:fld id="{5BCAD085-E8A6-8845-BD4E-CB4CCA059FC4}" type="datetimeFigureOut">
               <a:rPr lang="en-US" smtClean="0"/>
-              <a:t>1/27/13</a:t>
+              <a:t>5/27/2026</a:t>
             </a:fld>
             <a:endParaRPr lang="en-US"/>
           </a:p>
@@ -3702,10 +3836,9 @@
           </a:lstStyle>
           <a:p>
             <a:r>
-              <a:rPr lang="en-US" smtClean="0"/>
+              <a:rPr lang="en-US"/>
               <a:t>Click to edit Master title style</a:t>
             </a:r>
-            <a:endParaRPr lang="en-US"/>
           </a:p>
         </p:txBody>
       </p:sp>
@@ -3829,7 +3962,7 @@
           <a:p>
             <a:pPr lvl="0"/>
             <a:r>
-              <a:rPr lang="en-US" smtClean="0"/>
+              <a:rPr lang="en-US"/>
               <a:t>Click to edit Master text styles</a:t>
             </a:r>
           </a:p>
@@ -3852,7 +3985,7 @@
           <a:p>
             <a:fld id="{5BCAD085-E8A6-8845-BD4E-CB4CCA059FC4}" type="datetimeFigureOut">
               <a:rPr lang="en-US" smtClean="0"/>
-              <a:t>1/27/13</a:t>
+              <a:t>5/27/2026</a:t>
             </a:fld>
             <a:endParaRPr lang="en-US"/>
           </a:p>
@@ -3961,10 +4094,9 @@
           <a:lstStyle/>
           <a:p>
             <a:r>
-              <a:rPr lang="en-US" smtClean="0"/>
+              <a:rPr lang="en-US"/>
               <a:t>Click to edit Master title style</a:t>
             </a:r>
-            <a:endParaRPr lang="en-US"/>
           </a:p>
         </p:txBody>
       </p:sp>
@@ -3995,38 +4127,37 @@
           <a:p>
             <a:pPr lvl="0"/>
             <a:r>
-              <a:rPr lang="en-US" smtClean="0"/>
+              <a:rPr lang="en-US"/>
               <a:t>Click to edit Master text styles</a:t>
             </a:r>
           </a:p>
           <a:p>
             <a:pPr lvl="1"/>
             <a:r>
-              <a:rPr lang="en-US" smtClean="0"/>
+              <a:rPr lang="en-US"/>
               <a:t>Second level</a:t>
             </a:r>
           </a:p>
           <a:p>
             <a:pPr lvl="2"/>
             <a:r>
-              <a:rPr lang="en-US" smtClean="0"/>
+              <a:rPr lang="en-US"/>
               <a:t>Third level</a:t>
             </a:r>
           </a:p>
           <a:p>
             <a:pPr lvl="3"/>
             <a:r>
-              <a:rPr lang="en-US" smtClean="0"/>
+              <a:rPr lang="en-US"/>
               <a:t>Fourth level</a:t>
             </a:r>
           </a:p>
           <a:p>
             <a:pPr lvl="4"/>
             <a:r>
-              <a:rPr lang="en-US" smtClean="0"/>
+              <a:rPr lang="en-US"/>
               <a:t>Fifth level</a:t>
             </a:r>
-            <a:endParaRPr lang="en-US"/>
           </a:p>
         </p:txBody>
       </p:sp>
@@ -4065,7 +4196,7 @@
           <a:p>
             <a:fld id="{5BCAD085-E8A6-8845-BD4E-CB4CCA059FC4}" type="datetimeFigureOut">
               <a:rPr lang="en-US" smtClean="0"/>
-              <a:t>1/27/13</a:t>
+              <a:t>5/27/2026</a:t>
             </a:fld>
             <a:endParaRPr lang="en-US"/>
           </a:p>
@@ -4424,7 +4555,7 @@
 </file>
 
 <file path=ppt/slides/slide1.xml><?xml version="1.0" encoding="utf-8"?>
-<p:sld xmlns:a="http://schemas.openxmlformats.org/drawingml/2006/main" xmlns:p="http://schemas.openxmlformats.org/presentationml/2006/main" xmlns:r="http://schemas.openxmlformats.org/officeDocument/2006/relationships">
+<p:sld xmlns:a="http://schemas.openxmlformats.org/drawingml/2006/main" xmlns:r="http://schemas.openxmlformats.org/officeDocument/2006/relationships" xmlns:p="http://schemas.openxmlformats.org/presentationml/2006/main">
   <p:cSld>
     <p:bg>
       <p:bgPr>
@@ -4440,7 +4571,14 @@
         <p:cNvGrpSpPr/>
         <p:nvPr/>
       </p:nvGrpSpPr>
-      <p:grpSpPr/>
+      <p:grpSpPr>
+        <a:xfrm>
+          <a:off x="0" y="0"/>
+          <a:ext cx="0" cy="0"/>
+          <a:chOff x="0" y="0"/>
+          <a:chExt cx="0" cy="0"/>
+        </a:xfrm>
+      </p:grpSpPr>
       <p:sp>
         <p:nvSpPr>
           <p:cNvPr id="2" name="Rounded Rectangle 1"/>
@@ -4481,6 +4619,7 @@
           <a:lstStyle/>
           <a:p>
             <a:pPr algn="ctr"/>
+            <a:endParaRPr/>
           </a:p>
         </p:txBody>
       </p:sp>
@@ -4524,6 +4663,7 @@
           <a:lstStyle/>
           <a:p>
             <a:pPr algn="ctr"/>
+            <a:endParaRPr/>
           </a:p>
         </p:txBody>
       </p:sp>
@@ -4567,6 +4707,7 @@
           <a:lstStyle/>
           <a:p>
             <a:pPr algn="ctr"/>
+            <a:endParaRPr/>
           </a:p>
         </p:txBody>
       </p:sp>
@@ -4752,6 +4893,7 @@
           <a:lstStyle/>
           <a:p>
             <a:pPr algn="ctr"/>
+            <a:endParaRPr/>
           </a:p>
         </p:txBody>
       </p:sp>
@@ -4974,7 +5116,7 @@
 </file>
 
 <file path=ppt/slides/slide10.xml><?xml version="1.0" encoding="utf-8"?>
-<p:sld xmlns:a="http://schemas.openxmlformats.org/drawingml/2006/main" xmlns:p="http://schemas.openxmlformats.org/presentationml/2006/main" xmlns:r="http://schemas.openxmlformats.org/officeDocument/2006/relationships">
+<p:sld xmlns:a="http://schemas.openxmlformats.org/drawingml/2006/main" xmlns:r="http://schemas.openxmlformats.org/officeDocument/2006/relationships" xmlns:p="http://schemas.openxmlformats.org/presentationml/2006/main">
   <p:cSld>
     <p:bg>
       <p:bgPr>
@@ -4990,7 +5132,14 @@
         <p:cNvGrpSpPr/>
         <p:nvPr/>
       </p:nvGrpSpPr>
-      <p:grpSpPr/>
+      <p:grpSpPr>
+        <a:xfrm>
+          <a:off x="0" y="0"/>
+          <a:ext cx="0" cy="0"/>
+          <a:chOff x="0" y="0"/>
+          <a:chExt cx="0" cy="0"/>
+        </a:xfrm>
+      </p:grpSpPr>
       <p:sp>
         <p:nvSpPr>
           <p:cNvPr id="2" name="Rounded Rectangle 1"/>
@@ -5031,6 +5180,7 @@
           <a:lstStyle/>
           <a:p>
             <a:pPr algn="ctr"/>
+            <a:endParaRPr/>
           </a:p>
         </p:txBody>
       </p:sp>
@@ -5074,6 +5224,7 @@
           <a:lstStyle/>
           <a:p>
             <a:pPr algn="ctr"/>
+            <a:endParaRPr/>
           </a:p>
         </p:txBody>
       </p:sp>
@@ -5117,6 +5268,7 @@
           <a:lstStyle/>
           <a:p>
             <a:pPr algn="ctr"/>
+            <a:endParaRPr/>
           </a:p>
         </p:txBody>
       </p:sp>
@@ -5233,7 +5385,7 @@
         </p:nvSpPr>
         <p:spPr>
           <a:xfrm>
-            <a:off x="822960" y="1965960"/>
+            <a:off x="822960" y="2671039"/>
             <a:ext cx="1828800" cy="594360"/>
           </a:xfrm>
           <a:prstGeom prst="rect">
@@ -5268,7 +5420,7 @@
         </p:nvSpPr>
         <p:spPr>
           <a:xfrm>
-            <a:off x="822960" y="2532888"/>
+            <a:off x="822960" y="3237967"/>
             <a:ext cx="1828800" cy="320040"/>
           </a:xfrm>
           <a:prstGeom prst="rect">
@@ -5303,7 +5455,7 @@
         </p:nvSpPr>
         <p:spPr>
           <a:xfrm>
-            <a:off x="3063240" y="1965960"/>
+            <a:off x="3063240" y="2671039"/>
             <a:ext cx="2011680" cy="594360"/>
           </a:xfrm>
           <a:prstGeom prst="rect">
@@ -5338,7 +5490,7 @@
         </p:nvSpPr>
         <p:spPr>
           <a:xfrm>
-            <a:off x="3063240" y="2532888"/>
+            <a:off x="3063240" y="3237967"/>
             <a:ext cx="2011680" cy="320040"/>
           </a:xfrm>
           <a:prstGeom prst="rect">
@@ -5373,7 +5525,7 @@
         </p:nvSpPr>
         <p:spPr>
           <a:xfrm>
-            <a:off x="5486400" y="1965960"/>
+            <a:off x="5486400" y="2671039"/>
             <a:ext cx="2011680" cy="594360"/>
           </a:xfrm>
           <a:prstGeom prst="rect">
@@ -5408,7 +5560,7 @@
         </p:nvSpPr>
         <p:spPr>
           <a:xfrm>
-            <a:off x="5486400" y="2532888"/>
+            <a:off x="5486400" y="3237967"/>
             <a:ext cx="2011680" cy="320040"/>
           </a:xfrm>
           <a:prstGeom prst="rect">
@@ -5443,7 +5595,7 @@
         </p:nvSpPr>
         <p:spPr>
           <a:xfrm>
-            <a:off x="7726679" y="1965960"/>
+            <a:off x="7726679" y="2671039"/>
             <a:ext cx="2011680" cy="594360"/>
           </a:xfrm>
           <a:prstGeom prst="rect">
@@ -5478,7 +5630,7 @@
         </p:nvSpPr>
         <p:spPr>
           <a:xfrm>
-            <a:off x="7726679" y="2532888"/>
+            <a:off x="7726679" y="3237967"/>
             <a:ext cx="2011680" cy="320040"/>
           </a:xfrm>
           <a:prstGeom prst="rect">
@@ -5621,7 +5773,7 @@
 </file>
 
 <file path=ppt/slides/slide11.xml><?xml version="1.0" encoding="utf-8"?>
-<p:sld xmlns:a="http://schemas.openxmlformats.org/drawingml/2006/main" xmlns:p="http://schemas.openxmlformats.org/presentationml/2006/main" xmlns:r="http://schemas.openxmlformats.org/officeDocument/2006/relationships">
+<p:sld xmlns:a="http://schemas.openxmlformats.org/drawingml/2006/main" xmlns:r="http://schemas.openxmlformats.org/officeDocument/2006/relationships" xmlns:p="http://schemas.openxmlformats.org/presentationml/2006/main">
   <p:cSld>
     <p:bg>
       <p:bgPr>
@@ -5637,7 +5789,14 @@
         <p:cNvGrpSpPr/>
         <p:nvPr/>
       </p:nvGrpSpPr>
-      <p:grpSpPr/>
+      <p:grpSpPr>
+        <a:xfrm>
+          <a:off x="0" y="0"/>
+          <a:ext cx="0" cy="0"/>
+          <a:chOff x="0" y="0"/>
+          <a:chExt cx="0" cy="0"/>
+        </a:xfrm>
+      </p:grpSpPr>
       <p:sp>
         <p:nvSpPr>
           <p:cNvPr id="2" name="Rounded Rectangle 1"/>
@@ -5678,6 +5837,7 @@
           <a:lstStyle/>
           <a:p>
             <a:pPr algn="ctr"/>
+            <a:endParaRPr/>
           </a:p>
         </p:txBody>
       </p:sp>
@@ -5721,6 +5881,7 @@
           <a:lstStyle/>
           <a:p>
             <a:pPr algn="ctr"/>
+            <a:endParaRPr/>
           </a:p>
         </p:txBody>
       </p:sp>
@@ -5764,6 +5925,7 @@
           <a:lstStyle/>
           <a:p>
             <a:pPr algn="ctr"/>
+            <a:endParaRPr/>
           </a:p>
         </p:txBody>
       </p:sp>
@@ -5881,7 +6043,7 @@
         <p:spPr>
           <a:xfrm>
             <a:off x="868680" y="1828800"/>
-            <a:ext cx="5577840" cy="3931920"/>
+            <a:ext cx="6364224" cy="4578369"/>
           </a:xfrm>
           <a:prstGeom prst="rect">
             <a:avLst/>
@@ -5903,7 +6065,7 @@
               </a:spcAft>
             </a:pPr>
             <a:r>
-              <a:rPr sz="1700" b="1">
+              <a:rPr sz="1700" b="1" dirty="0">
                 <a:solidFill>
                   <a:srgbClr val="22D3EE"/>
                 </a:solidFill>
@@ -5912,13 +6074,31 @@
               <a:t>- </a:t>
             </a:r>
             <a:r>
-              <a:rPr sz="1700">
+              <a:rPr sz="1700" dirty="0">
                 <a:solidFill>
                   <a:srgbClr val="F6F8FF"/>
                 </a:solidFill>
                 <a:latin typeface="Aptos"/>
               </a:rPr>
-              <a:t>Live app: http://18.157.233.122:3001/ (EC2 deployment with Webshare proxy)</a:t>
+              <a:t>Live app: http://18.157.233.122:3001/ (EC2 deployment with </a:t>
+            </a:r>
+            <a:r>
+              <a:rPr sz="1700" dirty="0" err="1">
+                <a:solidFill>
+                  <a:srgbClr val="F6F8FF"/>
+                </a:solidFill>
+                <a:latin typeface="Aptos"/>
+              </a:rPr>
+              <a:t>Webshare</a:t>
+            </a:r>
+            <a:r>
+              <a:rPr sz="1700" dirty="0">
+                <a:solidFill>
+                  <a:srgbClr val="F6F8FF"/>
+                </a:solidFill>
+                <a:latin typeface="Aptos"/>
+              </a:rPr>
+              <a:t> proxy)</a:t>
             </a:r>
           </a:p>
           <a:p>
@@ -5931,7 +6111,7 @@
               </a:spcAft>
             </a:pPr>
             <a:r>
-              <a:rPr sz="1700" b="1">
+              <a:rPr sz="1700" b="1" dirty="0">
                 <a:solidFill>
                   <a:srgbClr val="22D3EE"/>
                 </a:solidFill>
@@ -5940,7 +6120,7 @@
               <a:t>- </a:t>
             </a:r>
             <a:r>
-              <a:rPr sz="1700">
+              <a:rPr sz="1700" dirty="0">
                 <a:solidFill>
                   <a:srgbClr val="F6F8FF"/>
                 </a:solidFill>
@@ -5959,7 +6139,7 @@
               </a:spcAft>
             </a:pPr>
             <a:r>
-              <a:rPr sz="1700" b="1">
+              <a:rPr sz="1700" b="1" dirty="0">
                 <a:solidFill>
                   <a:srgbClr val="22D3EE"/>
                 </a:solidFill>
@@ -5968,7 +6148,7 @@
               <a:t>- </a:t>
             </a:r>
             <a:r>
-              <a:rPr sz="1700">
+              <a:rPr sz="1700" dirty="0">
                 <a:solidFill>
                   <a:srgbClr val="F6F8FF"/>
                 </a:solidFill>
@@ -5987,7 +6167,7 @@
               </a:spcAft>
             </a:pPr>
             <a:r>
-              <a:rPr sz="1700" b="1">
+              <a:rPr sz="1700" b="1" dirty="0">
                 <a:solidFill>
                   <a:srgbClr val="22D3EE"/>
                 </a:solidFill>
@@ -5996,7 +6176,7 @@
               <a:t>- </a:t>
             </a:r>
             <a:r>
-              <a:rPr sz="1700">
+              <a:rPr sz="1700" dirty="0">
                 <a:solidFill>
                   <a:srgbClr val="F6F8FF"/>
                 </a:solidFill>
@@ -6015,7 +6195,7 @@
               </a:spcAft>
             </a:pPr>
             <a:r>
-              <a:rPr sz="1700" b="1">
+              <a:rPr sz="1700" b="1" dirty="0">
                 <a:solidFill>
                   <a:srgbClr val="22D3EE"/>
                 </a:solidFill>
@@ -6024,7 +6204,7 @@
               <a:t>- </a:t>
             </a:r>
             <a:r>
-              <a:rPr sz="1700">
+              <a:rPr sz="1700" dirty="0">
                 <a:solidFill>
                   <a:srgbClr val="F6F8FF"/>
                 </a:solidFill>
@@ -6043,7 +6223,7 @@
               </a:spcAft>
             </a:pPr>
             <a:r>
-              <a:rPr sz="1700" b="1">
+              <a:rPr sz="1700" b="1" dirty="0">
                 <a:solidFill>
                   <a:srgbClr val="22D3EE"/>
                 </a:solidFill>
@@ -6052,7 +6232,7 @@
               <a:t>- </a:t>
             </a:r>
             <a:r>
-              <a:rPr sz="1700">
+              <a:rPr sz="1700" dirty="0">
                 <a:solidFill>
                   <a:srgbClr val="F6F8FF"/>
                 </a:solidFill>
@@ -6071,7 +6251,7 @@
               </a:spcAft>
             </a:pPr>
             <a:r>
-              <a:rPr sz="1700" b="1">
+              <a:rPr sz="1700" b="1" dirty="0">
                 <a:solidFill>
                   <a:srgbClr val="22D3EE"/>
                 </a:solidFill>
@@ -6080,7 +6260,7 @@
               <a:t>- </a:t>
             </a:r>
             <a:r>
-              <a:rPr sz="1700">
+              <a:rPr sz="1700" dirty="0">
                 <a:solidFill>
                   <a:srgbClr val="F6F8FF"/>
                 </a:solidFill>
@@ -6099,7 +6279,7 @@
               </a:spcAft>
             </a:pPr>
             <a:r>
-              <a:rPr sz="1700" b="1">
+              <a:rPr sz="1700" b="1" dirty="0">
                 <a:solidFill>
                   <a:srgbClr val="22D3EE"/>
                 </a:solidFill>
@@ -6108,7 +6288,7 @@
               <a:t>- </a:t>
             </a:r>
             <a:r>
-              <a:rPr sz="1700">
+              <a:rPr sz="1700" dirty="0">
                 <a:solidFill>
                   <a:srgbClr val="F6F8FF"/>
                 </a:solidFill>
@@ -6127,7 +6307,7 @@
               </a:spcAft>
             </a:pPr>
             <a:r>
-              <a:rPr sz="1700" b="1">
+              <a:rPr sz="1700" b="1" dirty="0">
                 <a:solidFill>
                   <a:srgbClr val="22D3EE"/>
                 </a:solidFill>
@@ -6136,7 +6316,7 @@
               <a:t>- </a:t>
             </a:r>
             <a:r>
-              <a:rPr sz="1700">
+              <a:rPr sz="1700" dirty="0">
                 <a:solidFill>
                   <a:srgbClr val="F6F8FF"/>
                 </a:solidFill>
@@ -6155,7 +6335,7 @@
               </a:spcAft>
             </a:pPr>
             <a:r>
-              <a:rPr sz="1700" b="1">
+              <a:rPr sz="1700" b="1" dirty="0">
                 <a:solidFill>
                   <a:srgbClr val="22D3EE"/>
                 </a:solidFill>
@@ -6164,7 +6344,7 @@
               <a:t>- </a:t>
             </a:r>
             <a:r>
-              <a:rPr sz="1700">
+              <a:rPr sz="1700" dirty="0">
                 <a:solidFill>
                   <a:srgbClr val="F6F8FF"/>
                 </a:solidFill>
@@ -6217,6 +6397,7 @@
           <a:lstStyle/>
           <a:p>
             <a:pPr algn="ctr"/>
+            <a:endParaRPr/>
           </a:p>
         </p:txBody>
       </p:sp>
@@ -6334,7 +6515,7 @@
 </file>
 
 <file path=ppt/slides/slide12.xml><?xml version="1.0" encoding="utf-8"?>
-<p:sld xmlns:a="http://schemas.openxmlformats.org/drawingml/2006/main" xmlns:p="http://schemas.openxmlformats.org/presentationml/2006/main" xmlns:r="http://schemas.openxmlformats.org/officeDocument/2006/relationships">
+<p:sld xmlns:a="http://schemas.openxmlformats.org/drawingml/2006/main" xmlns:r="http://schemas.openxmlformats.org/officeDocument/2006/relationships" xmlns:p="http://schemas.openxmlformats.org/presentationml/2006/main">
   <p:cSld>
     <p:bg>
       <p:bgPr>
@@ -6350,7 +6531,14 @@
         <p:cNvGrpSpPr/>
         <p:nvPr/>
       </p:nvGrpSpPr>
-      <p:grpSpPr/>
+      <p:grpSpPr>
+        <a:xfrm>
+          <a:off x="0" y="0"/>
+          <a:ext cx="0" cy="0"/>
+          <a:chOff x="0" y="0"/>
+          <a:chExt cx="0" cy="0"/>
+        </a:xfrm>
+      </p:grpSpPr>
       <p:sp>
         <p:nvSpPr>
           <p:cNvPr id="2" name="Rounded Rectangle 1"/>
@@ -6391,6 +6579,7 @@
           <a:lstStyle/>
           <a:p>
             <a:pPr algn="ctr"/>
+            <a:endParaRPr/>
           </a:p>
         </p:txBody>
       </p:sp>
@@ -6434,6 +6623,7 @@
           <a:lstStyle/>
           <a:p>
             <a:pPr algn="ctr"/>
+            <a:endParaRPr/>
           </a:p>
         </p:txBody>
       </p:sp>
@@ -6477,6 +6667,7 @@
           <a:lstStyle/>
           <a:p>
             <a:pPr algn="ctr"/>
+            <a:endParaRPr/>
           </a:p>
         </p:txBody>
       </p:sp>
@@ -6558,8 +6749,8 @@
         </p:nvSpPr>
         <p:spPr>
           <a:xfrm>
-            <a:off x="777240" y="3749039"/>
-            <a:ext cx="3474720" cy="1234440"/>
+            <a:off x="777240" y="3297347"/>
+            <a:ext cx="3474720" cy="1640412"/>
           </a:xfrm>
           <a:prstGeom prst="roundRect">
             <a:avLst/>
@@ -6592,6 +6783,7 @@
           <a:lstStyle/>
           <a:p>
             <a:pPr algn="ctr"/>
+            <a:endParaRPr/>
           </a:p>
         </p:txBody>
       </p:sp>
@@ -6603,7 +6795,7 @@
         </p:nvSpPr>
         <p:spPr>
           <a:xfrm>
-            <a:off x="777240" y="3749039"/>
+            <a:off x="777240" y="3297347"/>
             <a:ext cx="73152" cy="1234440"/>
           </a:xfrm>
           <a:prstGeom prst="rect">
@@ -6635,6 +6827,7 @@
           <a:lstStyle/>
           <a:p>
             <a:pPr algn="ctr"/>
+            <a:endParaRPr/>
           </a:p>
         </p:txBody>
       </p:sp>
@@ -6646,7 +6839,7 @@
         </p:nvSpPr>
         <p:spPr>
           <a:xfrm>
-            <a:off x="978408" y="3913631"/>
+            <a:off x="978408" y="3461939"/>
             <a:ext cx="3154679" cy="228600"/>
           </a:xfrm>
           <a:prstGeom prst="rect">
@@ -6681,7 +6874,7 @@
         </p:nvSpPr>
         <p:spPr>
           <a:xfrm>
-            <a:off x="978408" y="4251959"/>
+            <a:off x="978408" y="3800267"/>
             <a:ext cx="3154679" cy="594360"/>
           </a:xfrm>
           <a:prstGeom prst="rect">
@@ -6716,8 +6909,8 @@
         </p:nvSpPr>
         <p:spPr>
           <a:xfrm>
-            <a:off x="4526280" y="3749039"/>
-            <a:ext cx="3474720" cy="1234440"/>
+            <a:off x="4526280" y="3297346"/>
+            <a:ext cx="3474720" cy="1640413"/>
           </a:xfrm>
           <a:prstGeom prst="roundRect">
             <a:avLst/>
@@ -6750,6 +6943,7 @@
           <a:lstStyle/>
           <a:p>
             <a:pPr algn="ctr"/>
+            <a:endParaRPr/>
           </a:p>
         </p:txBody>
       </p:sp>
@@ -6761,7 +6955,7 @@
         </p:nvSpPr>
         <p:spPr>
           <a:xfrm>
-            <a:off x="4526280" y="3749039"/>
+            <a:off x="4526280" y="3297347"/>
             <a:ext cx="73152" cy="1234440"/>
           </a:xfrm>
           <a:prstGeom prst="rect">
@@ -6793,6 +6987,7 @@
           <a:lstStyle/>
           <a:p>
             <a:pPr algn="ctr"/>
+            <a:endParaRPr/>
           </a:p>
         </p:txBody>
       </p:sp>
@@ -6804,7 +6999,7 @@
         </p:nvSpPr>
         <p:spPr>
           <a:xfrm>
-            <a:off x="4727448" y="3913631"/>
+            <a:off x="4727448" y="3461939"/>
             <a:ext cx="3154679" cy="228600"/>
           </a:xfrm>
           <a:prstGeom prst="rect">
@@ -6839,7 +7034,7 @@
         </p:nvSpPr>
         <p:spPr>
           <a:xfrm>
-            <a:off x="4727448" y="4251959"/>
+            <a:off x="4727448" y="3800267"/>
             <a:ext cx="3154679" cy="594360"/>
           </a:xfrm>
           <a:prstGeom prst="rect">
@@ -6874,8 +7069,8 @@
         </p:nvSpPr>
         <p:spPr>
           <a:xfrm>
-            <a:off x="8275320" y="3749039"/>
-            <a:ext cx="3108960" cy="1234440"/>
+            <a:off x="8275320" y="3297346"/>
+            <a:ext cx="3108960" cy="1640413"/>
           </a:xfrm>
           <a:prstGeom prst="roundRect">
             <a:avLst/>
@@ -6908,6 +7103,7 @@
           <a:lstStyle/>
           <a:p>
             <a:pPr algn="ctr"/>
+            <a:endParaRPr/>
           </a:p>
         </p:txBody>
       </p:sp>
@@ -6919,7 +7115,7 @@
         </p:nvSpPr>
         <p:spPr>
           <a:xfrm>
-            <a:off x="8275320" y="3749039"/>
+            <a:off x="8275320" y="3297347"/>
             <a:ext cx="73152" cy="1234440"/>
           </a:xfrm>
           <a:prstGeom prst="rect">
@@ -6951,6 +7147,7 @@
           <a:lstStyle/>
           <a:p>
             <a:pPr algn="ctr"/>
+            <a:endParaRPr/>
           </a:p>
         </p:txBody>
       </p:sp>
@@ -6962,7 +7159,7 @@
         </p:nvSpPr>
         <p:spPr>
           <a:xfrm>
-            <a:off x="8476488" y="3913631"/>
+            <a:off x="8476488" y="3461939"/>
             <a:ext cx="2788920" cy="228600"/>
           </a:xfrm>
           <a:prstGeom prst="rect">
@@ -6997,7 +7194,7 @@
         </p:nvSpPr>
         <p:spPr>
           <a:xfrm>
-            <a:off x="8476488" y="4251959"/>
+            <a:off x="8476488" y="3800267"/>
             <a:ext cx="2788920" cy="594360"/>
           </a:xfrm>
           <a:prstGeom prst="rect">
@@ -7032,8 +7229,8 @@
         </p:nvSpPr>
         <p:spPr>
           <a:xfrm>
-            <a:off x="777240" y="6144768"/>
-            <a:ext cx="2743200" cy="274320"/>
+            <a:off x="4724247" y="5758076"/>
+            <a:ext cx="2743200" cy="707886"/>
           </a:xfrm>
           <a:prstGeom prst="rect">
             <a:avLst/>
@@ -7048,7 +7245,7 @@
           <a:p>
             <a:pPr algn="l"/>
             <a:r>
-              <a:rPr sz="1400" b="1">
+              <a:rPr sz="4000" b="1" dirty="0">
                 <a:solidFill>
                   <a:srgbClr val="94A3B8"/>
                 </a:solidFill>
@@ -7056,6 +7253,21 @@
               </a:rPr>
               <a:t>Thank you</a:t>
             </a:r>
+            <a:r>
+              <a:rPr lang="de-DE" sz="4000" b="1" dirty="0">
+                <a:solidFill>
+                  <a:srgbClr val="94A3B8"/>
+                </a:solidFill>
+                <a:latin typeface="Aptos"/>
+              </a:rPr>
+              <a:t>!</a:t>
+            </a:r>
+            <a:endParaRPr sz="4000" b="1" dirty="0">
+              <a:solidFill>
+                <a:srgbClr val="94A3B8"/>
+              </a:solidFill>
+              <a:latin typeface="Aptos"/>
+            </a:endParaRPr>
           </a:p>
         </p:txBody>
       </p:sp>
@@ -7068,7 +7280,7 @@
 </file>
 
 <file path=ppt/slides/slide2.xml><?xml version="1.0" encoding="utf-8"?>
-<p:sld xmlns:a="http://schemas.openxmlformats.org/drawingml/2006/main" xmlns:p="http://schemas.openxmlformats.org/presentationml/2006/main" xmlns:r="http://schemas.openxmlformats.org/officeDocument/2006/relationships">
+<p:sld xmlns:a="http://schemas.openxmlformats.org/drawingml/2006/main" xmlns:r="http://schemas.openxmlformats.org/officeDocument/2006/relationships" xmlns:p="http://schemas.openxmlformats.org/presentationml/2006/main">
   <p:cSld>
     <p:bg>
       <p:bgPr>
@@ -7084,7 +7296,14 @@
         <p:cNvGrpSpPr/>
         <p:nvPr/>
       </p:nvGrpSpPr>
-      <p:grpSpPr/>
+      <p:grpSpPr>
+        <a:xfrm>
+          <a:off x="0" y="0"/>
+          <a:ext cx="0" cy="0"/>
+          <a:chOff x="0" y="0"/>
+          <a:chExt cx="0" cy="0"/>
+        </a:xfrm>
+      </p:grpSpPr>
       <p:sp>
         <p:nvSpPr>
           <p:cNvPr id="2" name="Rounded Rectangle 1"/>
@@ -7125,6 +7344,7 @@
           <a:lstStyle/>
           <a:p>
             <a:pPr algn="ctr"/>
+            <a:endParaRPr/>
           </a:p>
         </p:txBody>
       </p:sp>
@@ -7168,6 +7388,7 @@
           <a:lstStyle/>
           <a:p>
             <a:pPr algn="ctr"/>
+            <a:endParaRPr/>
           </a:p>
         </p:txBody>
       </p:sp>
@@ -7211,6 +7432,7 @@
           <a:lstStyle/>
           <a:p>
             <a:pPr algn="ctr"/>
+            <a:endParaRPr/>
           </a:p>
         </p:txBody>
       </p:sp>
@@ -7327,7 +7549,7 @@
         </p:nvSpPr>
         <p:spPr>
           <a:xfrm>
-            <a:off x="621792" y="1828800"/>
+            <a:off x="621792" y="2203378"/>
             <a:ext cx="7315200" cy="411480"/>
           </a:xfrm>
           <a:prstGeom prst="rect">
@@ -7343,13 +7565,22 @@
           <a:p>
             <a:pPr algn="l"/>
             <a:r>
-              <a:rPr sz="1800" b="0">
+              <a:rPr sz="1800" b="0" dirty="0" err="1">
                 <a:solidFill>
                   <a:srgbClr val="22D3EE"/>
                 </a:solidFill>
                 <a:latin typeface="Aptos"/>
               </a:rPr>
-              <a:t>AskTube AI turns a video into a searchable, conversational knowledge base.</a:t>
+              <a:t>AskTube</a:t>
+            </a:r>
+            <a:r>
+              <a:rPr sz="1800" b="0" dirty="0">
+                <a:solidFill>
+                  <a:srgbClr val="22D3EE"/>
+                </a:solidFill>
+                <a:latin typeface="Aptos"/>
+              </a:rPr>
+              <a:t> AI turns a video into a searchable, conversational knowledge base.</a:t>
             </a:r>
           </a:p>
         </p:txBody>
@@ -7362,7 +7593,7 @@
         </p:nvSpPr>
         <p:spPr>
           <a:xfrm>
-            <a:off x="658368" y="2743200"/>
+            <a:off x="658368" y="2875404"/>
             <a:ext cx="3246120" cy="1737360"/>
           </a:xfrm>
           <a:prstGeom prst="roundRect">
@@ -7396,6 +7627,7 @@
           <a:lstStyle/>
           <a:p>
             <a:pPr algn="ctr"/>
+            <a:endParaRPr/>
           </a:p>
         </p:txBody>
       </p:sp>
@@ -7407,7 +7639,7 @@
         </p:nvSpPr>
         <p:spPr>
           <a:xfrm>
-            <a:off x="658368" y="2743200"/>
+            <a:off x="658368" y="2875404"/>
             <a:ext cx="73152" cy="1737360"/>
           </a:xfrm>
           <a:prstGeom prst="rect">
@@ -7439,6 +7671,7 @@
           <a:lstStyle/>
           <a:p>
             <a:pPr algn="ctr"/>
+            <a:endParaRPr/>
           </a:p>
         </p:txBody>
       </p:sp>
@@ -7450,7 +7683,7 @@
         </p:nvSpPr>
         <p:spPr>
           <a:xfrm>
-            <a:off x="859536" y="2907792"/>
+            <a:off x="859536" y="3039996"/>
             <a:ext cx="2926079" cy="228600"/>
           </a:xfrm>
           <a:prstGeom prst="rect">
@@ -7485,7 +7718,7 @@
         </p:nvSpPr>
         <p:spPr>
           <a:xfrm>
-            <a:off x="859536" y="3246120"/>
+            <a:off x="859536" y="3378324"/>
             <a:ext cx="2926079" cy="1097280"/>
           </a:xfrm>
           <a:prstGeom prst="rect">
@@ -7520,7 +7753,7 @@
         </p:nvSpPr>
         <p:spPr>
           <a:xfrm>
-            <a:off x="4160520" y="2743200"/>
+            <a:off x="4160520" y="2875404"/>
             <a:ext cx="3246120" cy="1737360"/>
           </a:xfrm>
           <a:prstGeom prst="roundRect">
@@ -7554,6 +7787,7 @@
           <a:lstStyle/>
           <a:p>
             <a:pPr algn="ctr"/>
+            <a:endParaRPr/>
           </a:p>
         </p:txBody>
       </p:sp>
@@ -7565,7 +7799,7 @@
         </p:nvSpPr>
         <p:spPr>
           <a:xfrm>
-            <a:off x="4160520" y="2743200"/>
+            <a:off x="4160520" y="2875404"/>
             <a:ext cx="73152" cy="1737360"/>
           </a:xfrm>
           <a:prstGeom prst="rect">
@@ -7597,6 +7831,7 @@
           <a:lstStyle/>
           <a:p>
             <a:pPr algn="ctr"/>
+            <a:endParaRPr/>
           </a:p>
         </p:txBody>
       </p:sp>
@@ -7608,7 +7843,7 @@
         </p:nvSpPr>
         <p:spPr>
           <a:xfrm>
-            <a:off x="4361688" y="2907792"/>
+            <a:off x="4361688" y="3039996"/>
             <a:ext cx="2926079" cy="228600"/>
           </a:xfrm>
           <a:prstGeom prst="rect">
@@ -7643,7 +7878,7 @@
         </p:nvSpPr>
         <p:spPr>
           <a:xfrm>
-            <a:off x="4361688" y="3246120"/>
+            <a:off x="4361688" y="3378324"/>
             <a:ext cx="2926079" cy="1097280"/>
           </a:xfrm>
           <a:prstGeom prst="rect">
@@ -7678,7 +7913,7 @@
         </p:nvSpPr>
         <p:spPr>
           <a:xfrm>
-            <a:off x="7662672" y="2743200"/>
+            <a:off x="7662672" y="2875404"/>
             <a:ext cx="3246120" cy="1737360"/>
           </a:xfrm>
           <a:prstGeom prst="roundRect">
@@ -7712,6 +7947,7 @@
           <a:lstStyle/>
           <a:p>
             <a:pPr algn="ctr"/>
+            <a:endParaRPr/>
           </a:p>
         </p:txBody>
       </p:sp>
@@ -7723,7 +7959,7 @@
         </p:nvSpPr>
         <p:spPr>
           <a:xfrm>
-            <a:off x="7662672" y="2743200"/>
+            <a:off x="7662672" y="2875404"/>
             <a:ext cx="73152" cy="1737360"/>
           </a:xfrm>
           <a:prstGeom prst="rect">
@@ -7755,6 +7991,7 @@
           <a:lstStyle/>
           <a:p>
             <a:pPr algn="ctr"/>
+            <a:endParaRPr/>
           </a:p>
         </p:txBody>
       </p:sp>
@@ -7766,7 +8003,7 @@
         </p:nvSpPr>
         <p:spPr>
           <a:xfrm>
-            <a:off x="7863840" y="2907792"/>
+            <a:off x="7863840" y="3039996"/>
             <a:ext cx="2926079" cy="228600"/>
           </a:xfrm>
           <a:prstGeom prst="rect">
@@ -7801,7 +8038,7 @@
         </p:nvSpPr>
         <p:spPr>
           <a:xfrm>
-            <a:off x="7863840" y="3246120"/>
+            <a:off x="7863840" y="3378324"/>
             <a:ext cx="2926079" cy="1097280"/>
           </a:xfrm>
           <a:prstGeom prst="rect">
@@ -7837,7 +8074,7 @@
 </file>
 
 <file path=ppt/slides/slide3.xml><?xml version="1.0" encoding="utf-8"?>
-<p:sld xmlns:a="http://schemas.openxmlformats.org/drawingml/2006/main" xmlns:p="http://schemas.openxmlformats.org/presentationml/2006/main" xmlns:r="http://schemas.openxmlformats.org/officeDocument/2006/relationships">
+<p:sld xmlns:a="http://schemas.openxmlformats.org/drawingml/2006/main" xmlns:r="http://schemas.openxmlformats.org/officeDocument/2006/relationships" xmlns:p="http://schemas.openxmlformats.org/presentationml/2006/main">
   <p:cSld>
     <p:bg>
       <p:bgPr>
@@ -7853,7 +8090,14 @@
         <p:cNvGrpSpPr/>
         <p:nvPr/>
       </p:nvGrpSpPr>
-      <p:grpSpPr/>
+      <p:grpSpPr>
+        <a:xfrm>
+          <a:off x="0" y="0"/>
+          <a:ext cx="0" cy="0"/>
+          <a:chOff x="0" y="0"/>
+          <a:chExt cx="0" cy="0"/>
+        </a:xfrm>
+      </p:grpSpPr>
       <p:sp>
         <p:nvSpPr>
           <p:cNvPr id="2" name="Rounded Rectangle 1"/>
@@ -7894,6 +8138,7 @@
           <a:lstStyle/>
           <a:p>
             <a:pPr algn="ctr"/>
+            <a:endParaRPr/>
           </a:p>
         </p:txBody>
       </p:sp>
@@ -7937,6 +8182,7 @@
           <a:lstStyle/>
           <a:p>
             <a:pPr algn="ctr"/>
+            <a:endParaRPr/>
           </a:p>
         </p:txBody>
       </p:sp>
@@ -7980,6 +8226,7 @@
           <a:lstStyle/>
           <a:p>
             <a:pPr algn="ctr"/>
+            <a:endParaRPr/>
           </a:p>
         </p:txBody>
       </p:sp>
@@ -8096,7 +8343,7 @@
         </p:nvSpPr>
         <p:spPr>
           <a:xfrm>
-            <a:off x="640080" y="1920240"/>
+            <a:off x="640080" y="2702437"/>
             <a:ext cx="2057400" cy="1325880"/>
           </a:xfrm>
           <a:prstGeom prst="roundRect">
@@ -8130,6 +8377,7 @@
           <a:lstStyle/>
           <a:p>
             <a:pPr algn="ctr"/>
+            <a:endParaRPr/>
           </a:p>
         </p:txBody>
       </p:sp>
@@ -8141,7 +8389,7 @@
         </p:nvSpPr>
         <p:spPr>
           <a:xfrm>
-            <a:off x="804671" y="2084832"/>
+            <a:off x="804671" y="2867029"/>
             <a:ext cx="384048" cy="384048"/>
           </a:xfrm>
           <a:prstGeom prst="roundRect">
@@ -8173,6 +8421,7 @@
           <a:lstStyle/>
           <a:p>
             <a:pPr algn="ctr"/>
+            <a:endParaRPr/>
           </a:p>
         </p:txBody>
       </p:sp>
@@ -8184,7 +8433,7 @@
         </p:nvSpPr>
         <p:spPr>
           <a:xfrm>
-            <a:off x="905256" y="2167128"/>
+            <a:off x="905256" y="2949325"/>
             <a:ext cx="182880" cy="182880"/>
           </a:xfrm>
           <a:prstGeom prst="rect">
@@ -8219,7 +8468,7 @@
         </p:nvSpPr>
         <p:spPr>
           <a:xfrm>
-            <a:off x="1298448" y="2103120"/>
+            <a:off x="1298448" y="2885317"/>
             <a:ext cx="1234440" cy="228600"/>
           </a:xfrm>
           <a:prstGeom prst="rect">
@@ -8254,7 +8503,7 @@
         </p:nvSpPr>
         <p:spPr>
           <a:xfrm>
-            <a:off x="822959" y="2578608"/>
+            <a:off x="822959" y="3360805"/>
             <a:ext cx="1691640" cy="411480"/>
           </a:xfrm>
           <a:prstGeom prst="rect">
@@ -8289,7 +8538,7 @@
         </p:nvSpPr>
         <p:spPr>
           <a:xfrm>
-            <a:off x="2971800" y="1920240"/>
+            <a:off x="2971800" y="2702437"/>
             <a:ext cx="2057400" cy="1325880"/>
           </a:xfrm>
           <a:prstGeom prst="roundRect">
@@ -8323,6 +8572,7 @@
           <a:lstStyle/>
           <a:p>
             <a:pPr algn="ctr"/>
+            <a:endParaRPr/>
           </a:p>
         </p:txBody>
       </p:sp>
@@ -8334,7 +8584,7 @@
         </p:nvSpPr>
         <p:spPr>
           <a:xfrm>
-            <a:off x="3136392" y="2084832"/>
+            <a:off x="3136392" y="2867029"/>
             <a:ext cx="384048" cy="384048"/>
           </a:xfrm>
           <a:prstGeom prst="roundRect">
@@ -8366,6 +8616,7 @@
           <a:lstStyle/>
           <a:p>
             <a:pPr algn="ctr"/>
+            <a:endParaRPr/>
           </a:p>
         </p:txBody>
       </p:sp>
@@ -8377,7 +8628,7 @@
         </p:nvSpPr>
         <p:spPr>
           <a:xfrm>
-            <a:off x="3236976" y="2167128"/>
+            <a:off x="3236976" y="2949325"/>
             <a:ext cx="182880" cy="182880"/>
           </a:xfrm>
           <a:prstGeom prst="rect">
@@ -8412,7 +8663,7 @@
         </p:nvSpPr>
         <p:spPr>
           <a:xfrm>
-            <a:off x="3630168" y="2103120"/>
+            <a:off x="3630168" y="2885317"/>
             <a:ext cx="1234440" cy="228600"/>
           </a:xfrm>
           <a:prstGeom prst="rect">
@@ -8447,7 +8698,7 @@
         </p:nvSpPr>
         <p:spPr>
           <a:xfrm>
-            <a:off x="3154680" y="2578608"/>
+            <a:off x="3154680" y="3360805"/>
             <a:ext cx="1691640" cy="411480"/>
           </a:xfrm>
           <a:prstGeom prst="rect">
@@ -8482,7 +8733,7 @@
         </p:nvSpPr>
         <p:spPr>
           <a:xfrm>
-            <a:off x="5303520" y="1920240"/>
+            <a:off x="5303520" y="2702437"/>
             <a:ext cx="2057400" cy="1325880"/>
           </a:xfrm>
           <a:prstGeom prst="roundRect">
@@ -8516,6 +8767,7 @@
           <a:lstStyle/>
           <a:p>
             <a:pPr algn="ctr"/>
+            <a:endParaRPr/>
           </a:p>
         </p:txBody>
       </p:sp>
@@ -8527,7 +8779,7 @@
         </p:nvSpPr>
         <p:spPr>
           <a:xfrm>
-            <a:off x="5468112" y="2084832"/>
+            <a:off x="5468112" y="2867029"/>
             <a:ext cx="384048" cy="384048"/>
           </a:xfrm>
           <a:prstGeom prst="roundRect">
@@ -8559,6 +8811,7 @@
           <a:lstStyle/>
           <a:p>
             <a:pPr algn="ctr"/>
+            <a:endParaRPr/>
           </a:p>
         </p:txBody>
       </p:sp>
@@ -8570,7 +8823,7 @@
         </p:nvSpPr>
         <p:spPr>
           <a:xfrm>
-            <a:off x="5568696" y="2167128"/>
+            <a:off x="5568696" y="2949325"/>
             <a:ext cx="182880" cy="182880"/>
           </a:xfrm>
           <a:prstGeom prst="rect">
@@ -8605,7 +8858,7 @@
         </p:nvSpPr>
         <p:spPr>
           <a:xfrm>
-            <a:off x="5961888" y="2103120"/>
+            <a:off x="5961888" y="2885317"/>
             <a:ext cx="1234440" cy="228600"/>
           </a:xfrm>
           <a:prstGeom prst="rect">
@@ -8640,7 +8893,7 @@
         </p:nvSpPr>
         <p:spPr>
           <a:xfrm>
-            <a:off x="5486400" y="2578608"/>
+            <a:off x="5486400" y="3360805"/>
             <a:ext cx="1691640" cy="411480"/>
           </a:xfrm>
           <a:prstGeom prst="rect">
@@ -8675,7 +8928,7 @@
         </p:nvSpPr>
         <p:spPr>
           <a:xfrm>
-            <a:off x="7635240" y="1920240"/>
+            <a:off x="7635240" y="2702437"/>
             <a:ext cx="2057400" cy="1325880"/>
           </a:xfrm>
           <a:prstGeom prst="roundRect">
@@ -8709,6 +8962,7 @@
           <a:lstStyle/>
           <a:p>
             <a:pPr algn="ctr"/>
+            <a:endParaRPr/>
           </a:p>
         </p:txBody>
       </p:sp>
@@ -8720,7 +8974,7 @@
         </p:nvSpPr>
         <p:spPr>
           <a:xfrm>
-            <a:off x="7799831" y="2084832"/>
+            <a:off x="7799831" y="2867029"/>
             <a:ext cx="384048" cy="384048"/>
           </a:xfrm>
           <a:prstGeom prst="roundRect">
@@ -8752,6 +9006,7 @@
           <a:lstStyle/>
           <a:p>
             <a:pPr algn="ctr"/>
+            <a:endParaRPr/>
           </a:p>
         </p:txBody>
       </p:sp>
@@ -8763,7 +9018,7 @@
         </p:nvSpPr>
         <p:spPr>
           <a:xfrm>
-            <a:off x="7900415" y="2167128"/>
+            <a:off x="7900415" y="2949325"/>
             <a:ext cx="182880" cy="182880"/>
           </a:xfrm>
           <a:prstGeom prst="rect">
@@ -8798,7 +9053,7 @@
         </p:nvSpPr>
         <p:spPr>
           <a:xfrm>
-            <a:off x="8293608" y="2103120"/>
+            <a:off x="8293608" y="2885317"/>
             <a:ext cx="1234440" cy="228600"/>
           </a:xfrm>
           <a:prstGeom prst="rect">
@@ -8833,7 +9088,7 @@
         </p:nvSpPr>
         <p:spPr>
           <a:xfrm>
-            <a:off x="7818119" y="2578608"/>
+            <a:off x="7818119" y="3360805"/>
             <a:ext cx="1691640" cy="411480"/>
           </a:xfrm>
           <a:prstGeom prst="rect">
@@ -8868,7 +9123,7 @@
         </p:nvCxnSpPr>
         <p:spPr>
           <a:xfrm>
-            <a:off x="2724912" y="2578608"/>
+            <a:off x="2724912" y="3360805"/>
             <a:ext cx="201168" cy="0"/>
           </a:xfrm>
           <a:prstGeom prst="line">
@@ -8903,7 +9158,7 @@
         </p:nvCxnSpPr>
         <p:spPr>
           <a:xfrm>
-            <a:off x="5056632" y="2578608"/>
+            <a:off x="5056632" y="3360805"/>
             <a:ext cx="201168" cy="0"/>
           </a:xfrm>
           <a:prstGeom prst="line">
@@ -8938,7 +9193,7 @@
         </p:nvCxnSpPr>
         <p:spPr>
           <a:xfrm>
-            <a:off x="7388352" y="2578608"/>
+            <a:off x="7388352" y="3360805"/>
             <a:ext cx="201168" cy="0"/>
           </a:xfrm>
           <a:prstGeom prst="line">
@@ -8989,7 +9244,7 @@
           <a:p>
             <a:pPr algn="l"/>
             <a:r>
-              <a:rPr sz="1700" b="0">
+              <a:rPr sz="1700" b="0" dirty="0">
                 <a:solidFill>
                   <a:srgbClr val="94A3B8"/>
                 </a:solidFill>
@@ -9009,7 +9264,7 @@
 </file>
 
 <file path=ppt/slides/slide4.xml><?xml version="1.0" encoding="utf-8"?>
-<p:sld xmlns:a="http://schemas.openxmlformats.org/drawingml/2006/main" xmlns:p="http://schemas.openxmlformats.org/presentationml/2006/main" xmlns:r="http://schemas.openxmlformats.org/officeDocument/2006/relationships">
+<p:sld xmlns:a="http://schemas.openxmlformats.org/drawingml/2006/main" xmlns:r="http://schemas.openxmlformats.org/officeDocument/2006/relationships" xmlns:p="http://schemas.openxmlformats.org/presentationml/2006/main">
   <p:cSld>
     <p:bg>
       <p:bgPr>
@@ -9025,7 +9280,14 @@
         <p:cNvGrpSpPr/>
         <p:nvPr/>
       </p:nvGrpSpPr>
-      <p:grpSpPr/>
+      <p:grpSpPr>
+        <a:xfrm>
+          <a:off x="0" y="0"/>
+          <a:ext cx="0" cy="0"/>
+          <a:chOff x="0" y="0"/>
+          <a:chExt cx="0" cy="0"/>
+        </a:xfrm>
+      </p:grpSpPr>
       <p:sp>
         <p:nvSpPr>
           <p:cNvPr id="2" name="Rounded Rectangle 1"/>
@@ -9066,6 +9328,7 @@
           <a:lstStyle/>
           <a:p>
             <a:pPr algn="ctr"/>
+            <a:endParaRPr/>
           </a:p>
         </p:txBody>
       </p:sp>
@@ -9109,6 +9372,7 @@
           <a:lstStyle/>
           <a:p>
             <a:pPr algn="ctr"/>
+            <a:endParaRPr/>
           </a:p>
         </p:txBody>
       </p:sp>
@@ -9152,6 +9416,7 @@
           <a:lstStyle/>
           <a:p>
             <a:pPr algn="ctr"/>
+            <a:endParaRPr/>
           </a:p>
         </p:txBody>
       </p:sp>
@@ -9302,6 +9567,7 @@
           <a:lstStyle/>
           <a:p>
             <a:pPr algn="ctr"/>
+            <a:endParaRPr/>
           </a:p>
         </p:txBody>
       </p:sp>
@@ -9345,6 +9611,7 @@
           <a:lstStyle/>
           <a:p>
             <a:pPr algn="ctr"/>
+            <a:endParaRPr/>
           </a:p>
         </p:txBody>
       </p:sp>
@@ -9460,6 +9727,7 @@
           <a:lstStyle/>
           <a:p>
             <a:pPr algn="ctr"/>
+            <a:endParaRPr/>
           </a:p>
         </p:txBody>
       </p:sp>
@@ -9503,6 +9771,7 @@
           <a:lstStyle/>
           <a:p>
             <a:pPr algn="ctr"/>
+            <a:endParaRPr/>
           </a:p>
         </p:txBody>
       </p:sp>
@@ -9618,6 +9887,7 @@
           <a:lstStyle/>
           <a:p>
             <a:pPr algn="ctr"/>
+            <a:endParaRPr/>
           </a:p>
         </p:txBody>
       </p:sp>
@@ -9661,6 +9931,7 @@
           <a:lstStyle/>
           <a:p>
             <a:pPr algn="ctr"/>
+            <a:endParaRPr/>
           </a:p>
         </p:txBody>
       </p:sp>
@@ -9848,7 +10119,7 @@
 </file>
 
 <file path=ppt/slides/slide5.xml><?xml version="1.0" encoding="utf-8"?>
-<p:sld xmlns:a="http://schemas.openxmlformats.org/drawingml/2006/main" xmlns:p="http://schemas.openxmlformats.org/presentationml/2006/main" xmlns:r="http://schemas.openxmlformats.org/officeDocument/2006/relationships">
+<p:sld xmlns:a="http://schemas.openxmlformats.org/drawingml/2006/main" xmlns:r="http://schemas.openxmlformats.org/officeDocument/2006/relationships" xmlns:p="http://schemas.openxmlformats.org/presentationml/2006/main">
   <p:cSld>
     <p:bg>
       <p:bgPr>
@@ -9864,7 +10135,14 @@
         <p:cNvGrpSpPr/>
         <p:nvPr/>
       </p:nvGrpSpPr>
-      <p:grpSpPr/>
+      <p:grpSpPr>
+        <a:xfrm>
+          <a:off x="0" y="0"/>
+          <a:ext cx="0" cy="0"/>
+          <a:chOff x="0" y="0"/>
+          <a:chExt cx="0" cy="0"/>
+        </a:xfrm>
+      </p:grpSpPr>
       <p:sp>
         <p:nvSpPr>
           <p:cNvPr id="2" name="Rounded Rectangle 1"/>
@@ -9905,6 +10183,7 @@
           <a:lstStyle/>
           <a:p>
             <a:pPr algn="ctr"/>
+            <a:endParaRPr/>
           </a:p>
         </p:txBody>
       </p:sp>
@@ -9948,6 +10227,7 @@
           <a:lstStyle/>
           <a:p>
             <a:pPr algn="ctr"/>
+            <a:endParaRPr/>
           </a:p>
         </p:txBody>
       </p:sp>
@@ -9991,6 +10271,7 @@
           <a:lstStyle/>
           <a:p>
             <a:pPr algn="ctr"/>
+            <a:endParaRPr/>
           </a:p>
         </p:txBody>
       </p:sp>
@@ -10107,8 +10388,8 @@
         </p:nvSpPr>
         <p:spPr>
           <a:xfrm>
-            <a:off x="777240" y="1828800"/>
-            <a:ext cx="6035040" cy="3474720"/>
+            <a:off x="777240" y="2016089"/>
+            <a:ext cx="6547104" cy="2966646"/>
           </a:xfrm>
           <a:prstGeom prst="rect">
             <a:avLst/>
@@ -10130,7 +10411,7 @@
               </a:spcAft>
             </a:pPr>
             <a:r>
-              <a:rPr sz="1700" b="1">
+              <a:rPr sz="1700" b="1" dirty="0">
                 <a:solidFill>
                   <a:srgbClr val="FBBF24"/>
                 </a:solidFill>
@@ -10139,7 +10420,7 @@
               <a:t>- </a:t>
             </a:r>
             <a:r>
-              <a:rPr sz="1700">
+              <a:rPr sz="1700" dirty="0">
                 <a:solidFill>
                   <a:srgbClr val="F6F8FF"/>
                 </a:solidFill>
@@ -10158,7 +10439,7 @@
               </a:spcAft>
             </a:pPr>
             <a:r>
-              <a:rPr sz="1700" b="1">
+              <a:rPr sz="1700" b="1" dirty="0">
                 <a:solidFill>
                   <a:srgbClr val="FBBF24"/>
                 </a:solidFill>
@@ -10167,13 +10448,40 @@
               <a:t>- </a:t>
             </a:r>
             <a:r>
-              <a:rPr sz="1700">
+              <a:rPr sz="1700" dirty="0" err="1">
                 <a:solidFill>
                   <a:srgbClr val="F6F8FF"/>
                 </a:solidFill>
                 <a:latin typeface="Aptos"/>
               </a:rPr>
-              <a:t>youtube-transcript-api is the primary source for public captions and timestamps.</a:t>
+              <a:t>youtube</a:t>
+            </a:r>
+            <a:r>
+              <a:rPr sz="1700" dirty="0">
+                <a:solidFill>
+                  <a:srgbClr val="F6F8FF"/>
+                </a:solidFill>
+                <a:latin typeface="Aptos"/>
+              </a:rPr>
+              <a:t>-transcript-</a:t>
+            </a:r>
+            <a:r>
+              <a:rPr sz="1700" dirty="0" err="1">
+                <a:solidFill>
+                  <a:srgbClr val="F6F8FF"/>
+                </a:solidFill>
+                <a:latin typeface="Aptos"/>
+              </a:rPr>
+              <a:t>api</a:t>
+            </a:r>
+            <a:r>
+              <a:rPr sz="1700" dirty="0">
+                <a:solidFill>
+                  <a:srgbClr val="F6F8FF"/>
+                </a:solidFill>
+                <a:latin typeface="Aptos"/>
+              </a:rPr>
+              <a:t> is the primary source for public captions and timestamps.</a:t>
             </a:r>
           </a:p>
           <a:p>
@@ -10186,7 +10494,7 @@
               </a:spcAft>
             </a:pPr>
             <a:r>
-              <a:rPr sz="1700" b="1">
+              <a:rPr sz="1700" b="1" dirty="0">
                 <a:solidFill>
                   <a:srgbClr val="FBBF24"/>
                 </a:solidFill>
@@ -10195,7 +10503,7 @@
               <a:t>- </a:t>
             </a:r>
             <a:r>
-              <a:rPr sz="1700">
+              <a:rPr sz="1700" dirty="0">
                 <a:solidFill>
                   <a:srgbClr val="F6F8FF"/>
                 </a:solidFill>
@@ -10214,7 +10522,7 @@
               </a:spcAft>
             </a:pPr>
             <a:r>
-              <a:rPr sz="1700" b="1">
+              <a:rPr sz="1700" b="1" dirty="0">
                 <a:solidFill>
                   <a:srgbClr val="FBBF24"/>
                 </a:solidFill>
@@ -10223,13 +10531,22 @@
               <a:t>- </a:t>
             </a:r>
             <a:r>
-              <a:rPr sz="1700">
+              <a:rPr sz="1700" dirty="0" err="1">
                 <a:solidFill>
                   <a:srgbClr val="F6F8FF"/>
                 </a:solidFill>
                 <a:latin typeface="Aptos"/>
               </a:rPr>
-              <a:t>LangChain chunking keeps timestamp metadata attached to every chunk.</a:t>
+              <a:t>LangChain</a:t>
+            </a:r>
+            <a:r>
+              <a:rPr sz="1700" dirty="0">
+                <a:solidFill>
+                  <a:srgbClr val="F6F8FF"/>
+                </a:solidFill>
+                <a:latin typeface="Aptos"/>
+              </a:rPr>
+              <a:t> chunking keeps timestamp metadata attached to every chunk.</a:t>
             </a:r>
           </a:p>
           <a:p>
@@ -10242,7 +10559,7 @@
               </a:spcAft>
             </a:pPr>
             <a:r>
-              <a:rPr sz="1700" b="1">
+              <a:rPr sz="1700" b="1" dirty="0">
                 <a:solidFill>
                   <a:srgbClr val="FBBF24"/>
                 </a:solidFill>
@@ -10251,13 +10568,31 @@
               <a:t>- </a:t>
             </a:r>
             <a:r>
-              <a:rPr sz="1700">
+              <a:rPr sz="1700" dirty="0">
                 <a:solidFill>
                   <a:srgbClr val="F6F8FF"/>
                 </a:solidFill>
                 <a:latin typeface="Aptos"/>
               </a:rPr>
-              <a:t>OpenAI embeddings are stored in ChromaDB for similarity search.</a:t>
+              <a:t>OpenAI embeddings are stored in </a:t>
+            </a:r>
+            <a:r>
+              <a:rPr sz="1700" dirty="0" err="1">
+                <a:solidFill>
+                  <a:srgbClr val="F6F8FF"/>
+                </a:solidFill>
+                <a:latin typeface="Aptos"/>
+              </a:rPr>
+              <a:t>ChromaDB</a:t>
+            </a:r>
+            <a:r>
+              <a:rPr sz="1700" dirty="0">
+                <a:solidFill>
+                  <a:srgbClr val="F6F8FF"/>
+                </a:solidFill>
+                <a:latin typeface="Aptos"/>
+              </a:rPr>
+              <a:t> for similarity search.</a:t>
             </a:r>
           </a:p>
         </p:txBody>
@@ -10304,6 +10639,7 @@
           <a:lstStyle/>
           <a:p>
             <a:pPr algn="ctr"/>
+            <a:endParaRPr/>
           </a:p>
         </p:txBody>
       </p:sp>
@@ -10426,7 +10762,7 @@
 </file>
 
 <file path=ppt/slides/slide6.xml><?xml version="1.0" encoding="utf-8"?>
-<p:sld xmlns:a="http://schemas.openxmlformats.org/drawingml/2006/main" xmlns:p="http://schemas.openxmlformats.org/presentationml/2006/main" xmlns:r="http://schemas.openxmlformats.org/officeDocument/2006/relationships">
+<p:sld xmlns:a="http://schemas.openxmlformats.org/drawingml/2006/main" xmlns:r="http://schemas.openxmlformats.org/officeDocument/2006/relationships" xmlns:p="http://schemas.openxmlformats.org/presentationml/2006/main">
   <p:cSld>
     <p:bg>
       <p:bgPr>
@@ -10442,7 +10778,14 @@
         <p:cNvGrpSpPr/>
         <p:nvPr/>
       </p:nvGrpSpPr>
-      <p:grpSpPr/>
+      <p:grpSpPr>
+        <a:xfrm>
+          <a:off x="0" y="0"/>
+          <a:ext cx="0" cy="0"/>
+          <a:chOff x="0" y="0"/>
+          <a:chExt cx="0" cy="0"/>
+        </a:xfrm>
+      </p:grpSpPr>
       <p:sp>
         <p:nvSpPr>
           <p:cNvPr id="2" name="Rounded Rectangle 1"/>
@@ -10483,6 +10826,7 @@
           <a:lstStyle/>
           <a:p>
             <a:pPr algn="ctr"/>
+            <a:endParaRPr/>
           </a:p>
         </p:txBody>
       </p:sp>
@@ -10526,6 +10870,7 @@
           <a:lstStyle/>
           <a:p>
             <a:pPr algn="ctr"/>
+            <a:endParaRPr/>
           </a:p>
         </p:txBody>
       </p:sp>
@@ -10569,6 +10914,7 @@
           <a:lstStyle/>
           <a:p>
             <a:pPr algn="ctr"/>
+            <a:endParaRPr/>
           </a:p>
         </p:txBody>
       </p:sp>
@@ -10685,7 +11031,7 @@
         </p:nvSpPr>
         <p:spPr>
           <a:xfrm>
-            <a:off x="658368" y="1600200"/>
+            <a:off x="658368" y="1974778"/>
             <a:ext cx="9875520" cy="329184"/>
           </a:xfrm>
           <a:prstGeom prst="rect">
@@ -10701,13 +11047,58 @@
           <a:p>
             <a:pPr algn="l"/>
             <a:r>
-              <a:rPr sz="1600" b="0">
+              <a:rPr sz="1600" b="0" dirty="0" err="1">
                 <a:solidFill>
                   <a:srgbClr val="94A3B8"/>
                 </a:solidFill>
                 <a:latin typeface="Aptos"/>
               </a:rPr>
-              <a:t>AgentService binds StructuredTool objects to the LLM and returns answer, citations, tool steps, and session_id.</a:t>
+              <a:t>AgentService</a:t>
+            </a:r>
+            <a:r>
+              <a:rPr sz="1600" b="0" dirty="0">
+                <a:solidFill>
+                  <a:srgbClr val="94A3B8"/>
+                </a:solidFill>
+                <a:latin typeface="Aptos"/>
+              </a:rPr>
+              <a:t> binds </a:t>
+            </a:r>
+            <a:r>
+              <a:rPr sz="1600" b="0" dirty="0" err="1">
+                <a:solidFill>
+                  <a:srgbClr val="94A3B8"/>
+                </a:solidFill>
+                <a:latin typeface="Aptos"/>
+              </a:rPr>
+              <a:t>StructuredTool</a:t>
+            </a:r>
+            <a:r>
+              <a:rPr sz="1600" b="0" dirty="0">
+                <a:solidFill>
+                  <a:srgbClr val="94A3B8"/>
+                </a:solidFill>
+                <a:latin typeface="Aptos"/>
+              </a:rPr>
+              <a:t> objects to the LLM and returns answer, citations, tool steps, and </a:t>
+            </a:r>
+            <a:r>
+              <a:rPr sz="1600" b="0" dirty="0" err="1">
+                <a:solidFill>
+                  <a:srgbClr val="94A3B8"/>
+                </a:solidFill>
+                <a:latin typeface="Aptos"/>
+              </a:rPr>
+              <a:t>session_id</a:t>
+            </a:r>
+            <a:r>
+              <a:rPr sz="1600" b="0" dirty="0">
+                <a:solidFill>
+                  <a:srgbClr val="94A3B8"/>
+                </a:solidFill>
+                <a:latin typeface="Aptos"/>
+              </a:rPr>
+              <a:t>.</a:t>
             </a:r>
           </a:p>
         </p:txBody>
@@ -10720,7 +11111,7 @@
         </p:nvSpPr>
         <p:spPr>
           <a:xfrm>
-            <a:off x="777240" y="2148840"/>
+            <a:off x="777240" y="2402230"/>
             <a:ext cx="2880360" cy="438912"/>
           </a:xfrm>
           <a:prstGeom prst="roundRect">
@@ -10754,6 +11145,7 @@
           <a:lstStyle/>
           <a:p>
             <a:pPr algn="ctr"/>
+            <a:endParaRPr/>
           </a:p>
         </p:txBody>
       </p:sp>
@@ -10765,7 +11157,7 @@
         </p:nvSpPr>
         <p:spPr>
           <a:xfrm>
-            <a:off x="960120" y="2258568"/>
+            <a:off x="960120" y="2511958"/>
             <a:ext cx="2514600" cy="201168"/>
           </a:xfrm>
           <a:prstGeom prst="rect">
@@ -10800,7 +11192,7 @@
         </p:nvSpPr>
         <p:spPr>
           <a:xfrm>
-            <a:off x="4023359" y="2148840"/>
+            <a:off x="4023359" y="2402230"/>
             <a:ext cx="2880360" cy="438912"/>
           </a:xfrm>
           <a:prstGeom prst="roundRect">
@@ -10834,6 +11226,7 @@
           <a:lstStyle/>
           <a:p>
             <a:pPr algn="ctr"/>
+            <a:endParaRPr/>
           </a:p>
         </p:txBody>
       </p:sp>
@@ -10845,7 +11238,7 @@
         </p:nvSpPr>
         <p:spPr>
           <a:xfrm>
-            <a:off x="4206240" y="2258568"/>
+            <a:off x="4206240" y="2511958"/>
             <a:ext cx="2514600" cy="201168"/>
           </a:xfrm>
           <a:prstGeom prst="rect">
@@ -10880,7 +11273,7 @@
         </p:nvSpPr>
         <p:spPr>
           <a:xfrm>
-            <a:off x="777240" y="2807208"/>
+            <a:off x="777240" y="3060598"/>
             <a:ext cx="2880360" cy="438912"/>
           </a:xfrm>
           <a:prstGeom prst="roundRect">
@@ -10914,6 +11307,7 @@
           <a:lstStyle/>
           <a:p>
             <a:pPr algn="ctr"/>
+            <a:endParaRPr/>
           </a:p>
         </p:txBody>
       </p:sp>
@@ -10925,7 +11319,7 @@
         </p:nvSpPr>
         <p:spPr>
           <a:xfrm>
-            <a:off x="960120" y="2916936"/>
+            <a:off x="960120" y="3170326"/>
             <a:ext cx="2514600" cy="201168"/>
           </a:xfrm>
           <a:prstGeom prst="rect">
@@ -10960,7 +11354,7 @@
         </p:nvSpPr>
         <p:spPr>
           <a:xfrm>
-            <a:off x="4023359" y="2807208"/>
+            <a:off x="4023359" y="3060598"/>
             <a:ext cx="2880360" cy="438912"/>
           </a:xfrm>
           <a:prstGeom prst="roundRect">
@@ -10994,6 +11388,7 @@
           <a:lstStyle/>
           <a:p>
             <a:pPr algn="ctr"/>
+            <a:endParaRPr/>
           </a:p>
         </p:txBody>
       </p:sp>
@@ -11005,7 +11400,7 @@
         </p:nvSpPr>
         <p:spPr>
           <a:xfrm>
-            <a:off x="4206240" y="2916936"/>
+            <a:off x="4206240" y="3170326"/>
             <a:ext cx="2514600" cy="201168"/>
           </a:xfrm>
           <a:prstGeom prst="rect">
@@ -11040,7 +11435,7 @@
         </p:nvSpPr>
         <p:spPr>
           <a:xfrm>
-            <a:off x="777240" y="3465576"/>
+            <a:off x="777240" y="3718966"/>
             <a:ext cx="2880360" cy="438912"/>
           </a:xfrm>
           <a:prstGeom prst="roundRect">
@@ -11074,6 +11469,7 @@
           <a:lstStyle/>
           <a:p>
             <a:pPr algn="ctr"/>
+            <a:endParaRPr/>
           </a:p>
         </p:txBody>
       </p:sp>
@@ -11085,7 +11481,7 @@
         </p:nvSpPr>
         <p:spPr>
           <a:xfrm>
-            <a:off x="960120" y="3575304"/>
+            <a:off x="960120" y="3828694"/>
             <a:ext cx="2514600" cy="201168"/>
           </a:xfrm>
           <a:prstGeom prst="rect">
@@ -11120,7 +11516,7 @@
         </p:nvSpPr>
         <p:spPr>
           <a:xfrm>
-            <a:off x="4023359" y="3465576"/>
+            <a:off x="4023359" y="3718966"/>
             <a:ext cx="2880360" cy="438912"/>
           </a:xfrm>
           <a:prstGeom prst="roundRect">
@@ -11154,6 +11550,7 @@
           <a:lstStyle/>
           <a:p>
             <a:pPr algn="ctr"/>
+            <a:endParaRPr/>
           </a:p>
         </p:txBody>
       </p:sp>
@@ -11165,7 +11562,7 @@
         </p:nvSpPr>
         <p:spPr>
           <a:xfrm>
-            <a:off x="4206240" y="3575304"/>
+            <a:off x="4206240" y="3828694"/>
             <a:ext cx="2514600" cy="201168"/>
           </a:xfrm>
           <a:prstGeom prst="rect">
@@ -11200,7 +11597,7 @@
         </p:nvSpPr>
         <p:spPr>
           <a:xfrm>
-            <a:off x="777240" y="4123944"/>
+            <a:off x="777240" y="4377334"/>
             <a:ext cx="2880360" cy="438912"/>
           </a:xfrm>
           <a:prstGeom prst="roundRect">
@@ -11234,6 +11631,7 @@
           <a:lstStyle/>
           <a:p>
             <a:pPr algn="ctr"/>
+            <a:endParaRPr/>
           </a:p>
         </p:txBody>
       </p:sp>
@@ -11245,7 +11643,7 @@
         </p:nvSpPr>
         <p:spPr>
           <a:xfrm>
-            <a:off x="960120" y="4233672"/>
+            <a:off x="960120" y="4487062"/>
             <a:ext cx="2514600" cy="201168"/>
           </a:xfrm>
           <a:prstGeom prst="rect">
@@ -11314,6 +11712,7 @@
           <a:lstStyle/>
           <a:p>
             <a:pPr algn="ctr"/>
+            <a:endParaRPr/>
           </a:p>
         </p:txBody>
       </p:sp>
@@ -11357,6 +11756,7 @@
           <a:lstStyle/>
           <a:p>
             <a:pPr algn="ctr"/>
+            <a:endParaRPr/>
           </a:p>
         </p:txBody>
       </p:sp>
@@ -11472,6 +11872,7 @@
           <a:lstStyle/>
           <a:p>
             <a:pPr algn="ctr"/>
+            <a:endParaRPr/>
           </a:p>
         </p:txBody>
       </p:sp>
@@ -11515,6 +11916,7 @@
           <a:lstStyle/>
           <a:p>
             <a:pPr algn="ctr"/>
+            <a:endParaRPr/>
           </a:p>
         </p:txBody>
       </p:sp>
@@ -11597,7 +11999,7 @@
 </file>
 
 <file path=ppt/slides/slide7.xml><?xml version="1.0" encoding="utf-8"?>
-<p:sld xmlns:a="http://schemas.openxmlformats.org/drawingml/2006/main" xmlns:p="http://schemas.openxmlformats.org/presentationml/2006/main" xmlns:r="http://schemas.openxmlformats.org/officeDocument/2006/relationships">
+<p:sld xmlns:a="http://schemas.openxmlformats.org/drawingml/2006/main" xmlns:r="http://schemas.openxmlformats.org/officeDocument/2006/relationships" xmlns:p="http://schemas.openxmlformats.org/presentationml/2006/main">
   <p:cSld>
     <p:bg>
       <p:bgPr>
@@ -11613,7 +12015,14 @@
         <p:cNvGrpSpPr/>
         <p:nvPr/>
       </p:nvGrpSpPr>
-      <p:grpSpPr/>
+      <p:grpSpPr>
+        <a:xfrm>
+          <a:off x="0" y="0"/>
+          <a:ext cx="0" cy="0"/>
+          <a:chOff x="0" y="0"/>
+          <a:chExt cx="0" cy="0"/>
+        </a:xfrm>
+      </p:grpSpPr>
       <p:sp>
         <p:nvSpPr>
           <p:cNvPr id="2" name="Rounded Rectangle 1"/>
@@ -11654,6 +12063,7 @@
           <a:lstStyle/>
           <a:p>
             <a:pPr algn="ctr"/>
+            <a:endParaRPr/>
           </a:p>
         </p:txBody>
       </p:sp>
@@ -11697,6 +12107,7 @@
           <a:lstStyle/>
           <a:p>
             <a:pPr algn="ctr"/>
+            <a:endParaRPr/>
           </a:p>
         </p:txBody>
       </p:sp>
@@ -11740,6 +12151,7 @@
           <a:lstStyle/>
           <a:p>
             <a:pPr algn="ctr"/>
+            <a:endParaRPr/>
           </a:p>
         </p:txBody>
       </p:sp>
@@ -11856,7 +12268,7 @@
         </p:nvSpPr>
         <p:spPr>
           <a:xfrm>
-            <a:off x="777240" y="2011680"/>
+            <a:off x="777240" y="2584554"/>
             <a:ext cx="2057400" cy="1325880"/>
           </a:xfrm>
           <a:prstGeom prst="roundRect">
@@ -11890,6 +12302,7 @@
           <a:lstStyle/>
           <a:p>
             <a:pPr algn="ctr"/>
+            <a:endParaRPr/>
           </a:p>
         </p:txBody>
       </p:sp>
@@ -11901,7 +12314,7 @@
         </p:nvSpPr>
         <p:spPr>
           <a:xfrm>
-            <a:off x="941832" y="2176272"/>
+            <a:off x="941832" y="2749146"/>
             <a:ext cx="384048" cy="384048"/>
           </a:xfrm>
           <a:prstGeom prst="roundRect">
@@ -11933,6 +12346,7 @@
           <a:lstStyle/>
           <a:p>
             <a:pPr algn="ctr"/>
+            <a:endParaRPr/>
           </a:p>
         </p:txBody>
       </p:sp>
@@ -11944,7 +12358,7 @@
         </p:nvSpPr>
         <p:spPr>
           <a:xfrm>
-            <a:off x="1042415" y="2258568"/>
+            <a:off x="1042415" y="2831442"/>
             <a:ext cx="182880" cy="182880"/>
           </a:xfrm>
           <a:prstGeom prst="rect">
@@ -11979,7 +12393,7 @@
         </p:nvSpPr>
         <p:spPr>
           <a:xfrm>
-            <a:off x="1435607" y="2194560"/>
+            <a:off x="1435607" y="2767434"/>
             <a:ext cx="1234440" cy="228600"/>
           </a:xfrm>
           <a:prstGeom prst="rect">
@@ -12014,7 +12428,7 @@
         </p:nvSpPr>
         <p:spPr>
           <a:xfrm>
-            <a:off x="960120" y="2670048"/>
+            <a:off x="960120" y="3242922"/>
             <a:ext cx="1691640" cy="411480"/>
           </a:xfrm>
           <a:prstGeom prst="rect">
@@ -12049,7 +12463,7 @@
         </p:nvSpPr>
         <p:spPr>
           <a:xfrm>
-            <a:off x="3246120" y="2011680"/>
+            <a:off x="3246120" y="2584554"/>
             <a:ext cx="2057400" cy="1325880"/>
           </a:xfrm>
           <a:prstGeom prst="roundRect">
@@ -12083,6 +12497,7 @@
           <a:lstStyle/>
           <a:p>
             <a:pPr algn="ctr"/>
+            <a:endParaRPr/>
           </a:p>
         </p:txBody>
       </p:sp>
@@ -12094,7 +12509,7 @@
         </p:nvSpPr>
         <p:spPr>
           <a:xfrm>
-            <a:off x="3410712" y="2176272"/>
+            <a:off x="3410712" y="2749146"/>
             <a:ext cx="384048" cy="384048"/>
           </a:xfrm>
           <a:prstGeom prst="roundRect">
@@ -12126,6 +12541,7 @@
           <a:lstStyle/>
           <a:p>
             <a:pPr algn="ctr"/>
+            <a:endParaRPr/>
           </a:p>
         </p:txBody>
       </p:sp>
@@ -12137,7 +12553,7 @@
         </p:nvSpPr>
         <p:spPr>
           <a:xfrm>
-            <a:off x="3511296" y="2258568"/>
+            <a:off x="3511296" y="2831442"/>
             <a:ext cx="182880" cy="182880"/>
           </a:xfrm>
           <a:prstGeom prst="rect">
@@ -12172,7 +12588,7 @@
         </p:nvSpPr>
         <p:spPr>
           <a:xfrm>
-            <a:off x="3904487" y="2194560"/>
+            <a:off x="3904487" y="2767434"/>
             <a:ext cx="1234440" cy="228600"/>
           </a:xfrm>
           <a:prstGeom prst="rect">
@@ -12207,7 +12623,7 @@
         </p:nvSpPr>
         <p:spPr>
           <a:xfrm>
-            <a:off x="3429000" y="2670048"/>
+            <a:off x="3429000" y="3242922"/>
             <a:ext cx="1691640" cy="411480"/>
           </a:xfrm>
           <a:prstGeom prst="rect">
@@ -12242,7 +12658,7 @@
         </p:nvSpPr>
         <p:spPr>
           <a:xfrm>
-            <a:off x="5715000" y="2011680"/>
+            <a:off x="5715000" y="2584554"/>
             <a:ext cx="2057400" cy="1325880"/>
           </a:xfrm>
           <a:prstGeom prst="roundRect">
@@ -12276,6 +12692,7 @@
           <a:lstStyle/>
           <a:p>
             <a:pPr algn="ctr"/>
+            <a:endParaRPr/>
           </a:p>
         </p:txBody>
       </p:sp>
@@ -12287,7 +12704,7 @@
         </p:nvSpPr>
         <p:spPr>
           <a:xfrm>
-            <a:off x="5879592" y="2176272"/>
+            <a:off x="5879592" y="2749146"/>
             <a:ext cx="384048" cy="384048"/>
           </a:xfrm>
           <a:prstGeom prst="roundRect">
@@ -12319,6 +12736,7 @@
           <a:lstStyle/>
           <a:p>
             <a:pPr algn="ctr"/>
+            <a:endParaRPr/>
           </a:p>
         </p:txBody>
       </p:sp>
@@ -12330,7 +12748,7 @@
         </p:nvSpPr>
         <p:spPr>
           <a:xfrm>
-            <a:off x="5980176" y="2258568"/>
+            <a:off x="5980176" y="2831442"/>
             <a:ext cx="182880" cy="182880"/>
           </a:xfrm>
           <a:prstGeom prst="rect">
@@ -12365,7 +12783,7 @@
         </p:nvSpPr>
         <p:spPr>
           <a:xfrm>
-            <a:off x="6373368" y="2194560"/>
+            <a:off x="6373368" y="2767434"/>
             <a:ext cx="1234440" cy="228600"/>
           </a:xfrm>
           <a:prstGeom prst="rect">
@@ -12400,7 +12818,7 @@
         </p:nvSpPr>
         <p:spPr>
           <a:xfrm>
-            <a:off x="5897880" y="2670048"/>
+            <a:off x="5897880" y="3242922"/>
             <a:ext cx="1691640" cy="411480"/>
           </a:xfrm>
           <a:prstGeom prst="rect">
@@ -12435,7 +12853,7 @@
         </p:nvSpPr>
         <p:spPr>
           <a:xfrm>
-            <a:off x="8183879" y="2011680"/>
+            <a:off x="8183879" y="2584554"/>
             <a:ext cx="2057400" cy="1325880"/>
           </a:xfrm>
           <a:prstGeom prst="roundRect">
@@ -12469,6 +12887,7 @@
           <a:lstStyle/>
           <a:p>
             <a:pPr algn="ctr"/>
+            <a:endParaRPr/>
           </a:p>
         </p:txBody>
       </p:sp>
@@ -12480,7 +12899,7 @@
         </p:nvSpPr>
         <p:spPr>
           <a:xfrm>
-            <a:off x="8348471" y="2176272"/>
+            <a:off x="8348471" y="2749146"/>
             <a:ext cx="384048" cy="384048"/>
           </a:xfrm>
           <a:prstGeom prst="roundRect">
@@ -12512,6 +12931,7 @@
           <a:lstStyle/>
           <a:p>
             <a:pPr algn="ctr"/>
+            <a:endParaRPr/>
           </a:p>
         </p:txBody>
       </p:sp>
@@ -12523,7 +12943,7 @@
         </p:nvSpPr>
         <p:spPr>
           <a:xfrm>
-            <a:off x="8449055" y="2258568"/>
+            <a:off x="8449055" y="2831442"/>
             <a:ext cx="182880" cy="182880"/>
           </a:xfrm>
           <a:prstGeom prst="rect">
@@ -12558,7 +12978,7 @@
         </p:nvSpPr>
         <p:spPr>
           <a:xfrm>
-            <a:off x="8842248" y="2194560"/>
+            <a:off x="8842248" y="2767434"/>
             <a:ext cx="1234440" cy="228600"/>
           </a:xfrm>
           <a:prstGeom prst="rect">
@@ -12593,7 +13013,7 @@
         </p:nvSpPr>
         <p:spPr>
           <a:xfrm>
-            <a:off x="8366759" y="2670048"/>
+            <a:off x="8366759" y="3242922"/>
             <a:ext cx="1691640" cy="411480"/>
           </a:xfrm>
           <a:prstGeom prst="rect">
@@ -12628,7 +13048,7 @@
         </p:nvCxnSpPr>
         <p:spPr>
           <a:xfrm>
-            <a:off x="2971800" y="2670048"/>
+            <a:off x="2971800" y="3242922"/>
             <a:ext cx="201168" cy="0"/>
           </a:xfrm>
           <a:prstGeom prst="line">
@@ -12663,7 +13083,7 @@
         </p:nvCxnSpPr>
         <p:spPr>
           <a:xfrm>
-            <a:off x="5440680" y="2670048"/>
+            <a:off x="5440680" y="3242922"/>
             <a:ext cx="201168" cy="0"/>
           </a:xfrm>
           <a:prstGeom prst="line">
@@ -12698,7 +13118,7 @@
         </p:nvCxnSpPr>
         <p:spPr>
           <a:xfrm>
-            <a:off x="7909560" y="2670048"/>
+            <a:off x="7909560" y="3242922"/>
             <a:ext cx="201168" cy="0"/>
           </a:xfrm>
           <a:prstGeom prst="line">
@@ -12769,7 +13189,7 @@
 </file>
 
 <file path=ppt/slides/slide8.xml><?xml version="1.0" encoding="utf-8"?>
-<p:sld xmlns:a="http://schemas.openxmlformats.org/drawingml/2006/main" xmlns:p="http://schemas.openxmlformats.org/presentationml/2006/main" xmlns:r="http://schemas.openxmlformats.org/officeDocument/2006/relationships">
+<p:sld xmlns:a="http://schemas.openxmlformats.org/drawingml/2006/main" xmlns:r="http://schemas.openxmlformats.org/officeDocument/2006/relationships" xmlns:p="http://schemas.openxmlformats.org/presentationml/2006/main">
   <p:cSld>
     <p:bg>
       <p:bgPr>
@@ -12785,7 +13205,14 @@
         <p:cNvGrpSpPr/>
         <p:nvPr/>
       </p:nvGrpSpPr>
-      <p:grpSpPr/>
+      <p:grpSpPr>
+        <a:xfrm>
+          <a:off x="0" y="0"/>
+          <a:ext cx="0" cy="0"/>
+          <a:chOff x="0" y="0"/>
+          <a:chExt cx="0" cy="0"/>
+        </a:xfrm>
+      </p:grpSpPr>
       <p:sp>
         <p:nvSpPr>
           <p:cNvPr id="2" name="Rounded Rectangle 1"/>
@@ -12826,6 +13253,7 @@
           <a:lstStyle/>
           <a:p>
             <a:pPr algn="ctr"/>
+            <a:endParaRPr/>
           </a:p>
         </p:txBody>
       </p:sp>
@@ -12869,6 +13297,7 @@
           <a:lstStyle/>
           <a:p>
             <a:pPr algn="ctr"/>
+            <a:endParaRPr/>
           </a:p>
         </p:txBody>
       </p:sp>
@@ -12912,6 +13341,7 @@
           <a:lstStyle/>
           <a:p>
             <a:pPr algn="ctr"/>
+            <a:endParaRPr/>
           </a:p>
         </p:txBody>
       </p:sp>
@@ -13028,7 +13458,7 @@
         </p:nvSpPr>
         <p:spPr>
           <a:xfrm>
-            <a:off x="685800" y="1920240"/>
+            <a:off x="685800" y="2493117"/>
             <a:ext cx="3337560" cy="1828800"/>
           </a:xfrm>
           <a:prstGeom prst="roundRect">
@@ -13062,6 +13492,7 @@
           <a:lstStyle/>
           <a:p>
             <a:pPr algn="ctr"/>
+            <a:endParaRPr/>
           </a:p>
         </p:txBody>
       </p:sp>
@@ -13073,7 +13504,7 @@
         </p:nvSpPr>
         <p:spPr>
           <a:xfrm>
-            <a:off x="685800" y="1920240"/>
+            <a:off x="685800" y="2493117"/>
             <a:ext cx="73152" cy="1828800"/>
           </a:xfrm>
           <a:prstGeom prst="rect">
@@ -13105,6 +13536,7 @@
           <a:lstStyle/>
           <a:p>
             <a:pPr algn="ctr"/>
+            <a:endParaRPr/>
           </a:p>
         </p:txBody>
       </p:sp>
@@ -13116,7 +13548,7 @@
         </p:nvSpPr>
         <p:spPr>
           <a:xfrm>
-            <a:off x="886968" y="2084832"/>
+            <a:off x="886968" y="2657709"/>
             <a:ext cx="3017520" cy="228600"/>
           </a:xfrm>
           <a:prstGeom prst="rect">
@@ -13151,7 +13583,7 @@
         </p:nvSpPr>
         <p:spPr>
           <a:xfrm>
-            <a:off x="886968" y="2423160"/>
+            <a:off x="886968" y="2996037"/>
             <a:ext cx="3017520" cy="1188720"/>
           </a:xfrm>
           <a:prstGeom prst="rect">
@@ -13186,7 +13618,7 @@
         </p:nvSpPr>
         <p:spPr>
           <a:xfrm>
-            <a:off x="4434840" y="1920240"/>
+            <a:off x="4434840" y="2493117"/>
             <a:ext cx="3337560" cy="1828800"/>
           </a:xfrm>
           <a:prstGeom prst="roundRect">
@@ -13220,6 +13652,7 @@
           <a:lstStyle/>
           <a:p>
             <a:pPr algn="ctr"/>
+            <a:endParaRPr/>
           </a:p>
         </p:txBody>
       </p:sp>
@@ -13231,7 +13664,7 @@
         </p:nvSpPr>
         <p:spPr>
           <a:xfrm>
-            <a:off x="4434840" y="1920240"/>
+            <a:off x="4434840" y="2493117"/>
             <a:ext cx="73152" cy="1828800"/>
           </a:xfrm>
           <a:prstGeom prst="rect">
@@ -13263,6 +13696,7 @@
           <a:lstStyle/>
           <a:p>
             <a:pPr algn="ctr"/>
+            <a:endParaRPr/>
           </a:p>
         </p:txBody>
       </p:sp>
@@ -13274,7 +13708,7 @@
         </p:nvSpPr>
         <p:spPr>
           <a:xfrm>
-            <a:off x="4636007" y="2084832"/>
+            <a:off x="4636007" y="2657709"/>
             <a:ext cx="3017520" cy="228600"/>
           </a:xfrm>
           <a:prstGeom prst="rect">
@@ -13309,7 +13743,7 @@
         </p:nvSpPr>
         <p:spPr>
           <a:xfrm>
-            <a:off x="4636007" y="2423160"/>
+            <a:off x="4636007" y="2996037"/>
             <a:ext cx="3017520" cy="1188720"/>
           </a:xfrm>
           <a:prstGeom prst="rect">
@@ -13344,7 +13778,7 @@
         </p:nvSpPr>
         <p:spPr>
           <a:xfrm>
-            <a:off x="8183879" y="1920240"/>
+            <a:off x="8183879" y="2493117"/>
             <a:ext cx="3337560" cy="1828800"/>
           </a:xfrm>
           <a:prstGeom prst="roundRect">
@@ -13378,6 +13812,7 @@
           <a:lstStyle/>
           <a:p>
             <a:pPr algn="ctr"/>
+            <a:endParaRPr/>
           </a:p>
         </p:txBody>
       </p:sp>
@@ -13389,7 +13824,7 @@
         </p:nvSpPr>
         <p:spPr>
           <a:xfrm>
-            <a:off x="8183879" y="1920240"/>
+            <a:off x="8183879" y="2493117"/>
             <a:ext cx="73152" cy="1828800"/>
           </a:xfrm>
           <a:prstGeom prst="rect">
@@ -13421,6 +13856,7 @@
           <a:lstStyle/>
           <a:p>
             <a:pPr algn="ctr"/>
+            <a:endParaRPr/>
           </a:p>
         </p:txBody>
       </p:sp>
@@ -13432,7 +13868,7 @@
         </p:nvSpPr>
         <p:spPr>
           <a:xfrm>
-            <a:off x="8385048" y="2084832"/>
+            <a:off x="8385048" y="2657709"/>
             <a:ext cx="3017520" cy="228600"/>
           </a:xfrm>
           <a:prstGeom prst="rect">
@@ -13467,7 +13903,7 @@
         </p:nvSpPr>
         <p:spPr>
           <a:xfrm>
-            <a:off x="8385048" y="2423160"/>
+            <a:off x="8385048" y="2996037"/>
             <a:ext cx="3017520" cy="1188720"/>
           </a:xfrm>
           <a:prstGeom prst="rect">
@@ -13518,7 +13954,7 @@
           <a:p>
             <a:pPr algn="l"/>
             <a:r>
-              <a:rPr sz="1800" b="0">
+              <a:rPr sz="1800" b="0" dirty="0">
                 <a:solidFill>
                   <a:srgbClr val="94A3B8"/>
                 </a:solidFill>
@@ -13538,7 +13974,7 @@
 </file>
 
 <file path=ppt/slides/slide9.xml><?xml version="1.0" encoding="utf-8"?>
-<p:sld xmlns:a="http://schemas.openxmlformats.org/drawingml/2006/main" xmlns:p="http://schemas.openxmlformats.org/presentationml/2006/main" xmlns:r="http://schemas.openxmlformats.org/officeDocument/2006/relationships">
+<p:sld xmlns:a="http://schemas.openxmlformats.org/drawingml/2006/main" xmlns:r="http://schemas.openxmlformats.org/officeDocument/2006/relationships" xmlns:p="http://schemas.openxmlformats.org/presentationml/2006/main">
   <p:cSld>
     <p:bg>
       <p:bgPr>
@@ -13554,7 +13990,14 @@
         <p:cNvGrpSpPr/>
         <p:nvPr/>
       </p:nvGrpSpPr>
-      <p:grpSpPr/>
+      <p:grpSpPr>
+        <a:xfrm>
+          <a:off x="0" y="0"/>
+          <a:ext cx="0" cy="0"/>
+          <a:chOff x="0" y="0"/>
+          <a:chExt cx="0" cy="0"/>
+        </a:xfrm>
+      </p:grpSpPr>
       <p:sp>
         <p:nvSpPr>
           <p:cNvPr id="2" name="Rounded Rectangle 1"/>
@@ -13595,6 +14038,7 @@
           <a:lstStyle/>
           <a:p>
             <a:pPr algn="ctr"/>
+            <a:endParaRPr/>
           </a:p>
         </p:txBody>
       </p:sp>
@@ -13638,6 +14082,7 @@
           <a:lstStyle/>
           <a:p>
             <a:pPr algn="ctr"/>
+            <a:endParaRPr/>
           </a:p>
         </p:txBody>
       </p:sp>
@@ -13681,6 +14126,7 @@
           <a:lstStyle/>
           <a:p>
             <a:pPr algn="ctr"/>
+            <a:endParaRPr/>
           </a:p>
         </p:txBody>
       </p:sp>
@@ -13797,7 +14243,7 @@
         </p:nvSpPr>
         <p:spPr>
           <a:xfrm>
-            <a:off x="658368" y="1600200"/>
+            <a:off x="658368" y="1996808"/>
             <a:ext cx="9692640" cy="329184"/>
           </a:xfrm>
           <a:prstGeom prst="rect">
@@ -13832,7 +14278,7 @@
         </p:nvSpPr>
         <p:spPr>
           <a:xfrm>
-            <a:off x="685800" y="2148840"/>
+            <a:off x="685800" y="2545448"/>
             <a:ext cx="3246120" cy="1691640"/>
           </a:xfrm>
           <a:prstGeom prst="roundRect">
@@ -13866,6 +14312,7 @@
           <a:lstStyle/>
           <a:p>
             <a:pPr algn="ctr"/>
+            <a:endParaRPr/>
           </a:p>
         </p:txBody>
       </p:sp>
@@ -13877,7 +14324,7 @@
         </p:nvSpPr>
         <p:spPr>
           <a:xfrm>
-            <a:off x="685800" y="2148840"/>
+            <a:off x="685800" y="2545448"/>
             <a:ext cx="73152" cy="1691640"/>
           </a:xfrm>
           <a:prstGeom prst="rect">
@@ -13909,6 +14356,7 @@
           <a:lstStyle/>
           <a:p>
             <a:pPr algn="ctr"/>
+            <a:endParaRPr/>
           </a:p>
         </p:txBody>
       </p:sp>
@@ -13920,7 +14368,7 @@
         </p:nvSpPr>
         <p:spPr>
           <a:xfrm>
-            <a:off x="886968" y="2313432"/>
+            <a:off x="886968" y="2710040"/>
             <a:ext cx="2926079" cy="228600"/>
           </a:xfrm>
           <a:prstGeom prst="rect">
@@ -13955,7 +14403,7 @@
         </p:nvSpPr>
         <p:spPr>
           <a:xfrm>
-            <a:off x="886968" y="2651760"/>
+            <a:off x="886968" y="3048368"/>
             <a:ext cx="2926079" cy="1051560"/>
           </a:xfrm>
           <a:prstGeom prst="rect">
@@ -13990,7 +14438,7 @@
         </p:nvSpPr>
         <p:spPr>
           <a:xfrm>
-            <a:off x="4160520" y="2148840"/>
+            <a:off x="4160520" y="2545448"/>
             <a:ext cx="3246120" cy="1691640"/>
           </a:xfrm>
           <a:prstGeom prst="roundRect">
@@ -14024,6 +14472,7 @@
           <a:lstStyle/>
           <a:p>
             <a:pPr algn="ctr"/>
+            <a:endParaRPr/>
           </a:p>
         </p:txBody>
       </p:sp>
@@ -14035,7 +14484,7 @@
         </p:nvSpPr>
         <p:spPr>
           <a:xfrm>
-            <a:off x="4160520" y="2148840"/>
+            <a:off x="4160520" y="2545448"/>
             <a:ext cx="73152" cy="1691640"/>
           </a:xfrm>
           <a:prstGeom prst="rect">
@@ -14067,6 +14516,7 @@
           <a:lstStyle/>
           <a:p>
             <a:pPr algn="ctr"/>
+            <a:endParaRPr/>
           </a:p>
         </p:txBody>
       </p:sp>
@@ -14078,7 +14528,7 @@
         </p:nvSpPr>
         <p:spPr>
           <a:xfrm>
-            <a:off x="4361688" y="2313432"/>
+            <a:off x="4361688" y="2710040"/>
             <a:ext cx="2926079" cy="228600"/>
           </a:xfrm>
           <a:prstGeom prst="rect">
@@ -14113,7 +14563,7 @@
         </p:nvSpPr>
         <p:spPr>
           <a:xfrm>
-            <a:off x="4361688" y="2651760"/>
+            <a:off x="4361688" y="3048368"/>
             <a:ext cx="2926079" cy="1051560"/>
           </a:xfrm>
           <a:prstGeom prst="rect">
@@ -14148,7 +14598,7 @@
         </p:nvSpPr>
         <p:spPr>
           <a:xfrm>
-            <a:off x="7635240" y="2148840"/>
+            <a:off x="7635240" y="2545448"/>
             <a:ext cx="3246120" cy="1691640"/>
           </a:xfrm>
           <a:prstGeom prst="roundRect">
@@ -14182,6 +14632,7 @@
           <a:lstStyle/>
           <a:p>
             <a:pPr algn="ctr"/>
+            <a:endParaRPr/>
           </a:p>
         </p:txBody>
       </p:sp>
@@ -14193,7 +14644,7 @@
         </p:nvSpPr>
         <p:spPr>
           <a:xfrm>
-            <a:off x="7635240" y="2148840"/>
+            <a:off x="7635240" y="2545448"/>
             <a:ext cx="73152" cy="1691640"/>
           </a:xfrm>
           <a:prstGeom prst="rect">
@@ -14225,6 +14676,7 @@
           <a:lstStyle/>
           <a:p>
             <a:pPr algn="ctr"/>
+            <a:endParaRPr/>
           </a:p>
         </p:txBody>
       </p:sp>
@@ -14236,7 +14688,7 @@
         </p:nvSpPr>
         <p:spPr>
           <a:xfrm>
-            <a:off x="7836408" y="2313432"/>
+            <a:off x="7836408" y="2710040"/>
             <a:ext cx="2926079" cy="228600"/>
           </a:xfrm>
           <a:prstGeom prst="rect">
@@ -14271,7 +14723,7 @@
         </p:nvSpPr>
         <p:spPr>
           <a:xfrm>
-            <a:off x="7836408" y="2651760"/>
+            <a:off x="7836408" y="3048368"/>
             <a:ext cx="2926079" cy="1051560"/>
           </a:xfrm>
           <a:prstGeom prst="rect">
@@ -14306,7 +14758,7 @@
         </p:nvSpPr>
         <p:spPr>
           <a:xfrm>
-            <a:off x="777240" y="4434840"/>
+            <a:off x="777240" y="4831448"/>
             <a:ext cx="4800600" cy="777240"/>
           </a:xfrm>
           <a:prstGeom prst="roundRect">
@@ -14340,6 +14792,7 @@
           <a:lstStyle/>
           <a:p>
             <a:pPr algn="ctr"/>
+            <a:endParaRPr/>
           </a:p>
         </p:txBody>
       </p:sp>
@@ -14351,7 +14804,7 @@
         </p:nvSpPr>
         <p:spPr>
           <a:xfrm>
-            <a:off x="1005840" y="4608576"/>
+            <a:off x="1005840" y="5005184"/>
             <a:ext cx="1600200" cy="256032"/>
           </a:xfrm>
           <a:prstGeom prst="rect">
@@ -14386,7 +14839,7 @@
         </p:nvSpPr>
         <p:spPr>
           <a:xfrm>
-            <a:off x="2651760" y="4617720"/>
+            <a:off x="2651760" y="5014328"/>
             <a:ext cx="2743200" cy="256032"/>
           </a:xfrm>
           <a:prstGeom prst="rect">
@@ -14421,7 +14874,7 @@
         </p:nvSpPr>
         <p:spPr>
           <a:xfrm>
-            <a:off x="5989320" y="4434840"/>
+            <a:off x="5989320" y="4831448"/>
             <a:ext cx="4800600" cy="777240"/>
           </a:xfrm>
           <a:prstGeom prst="roundRect">
@@ -14455,6 +14908,7 @@
           <a:lstStyle/>
           <a:p>
             <a:pPr algn="ctr"/>
+            <a:endParaRPr/>
           </a:p>
         </p:txBody>
       </p:sp>
@@ -14466,7 +14920,7 @@
         </p:nvSpPr>
         <p:spPr>
           <a:xfrm>
-            <a:off x="6217920" y="4608576"/>
+            <a:off x="6217920" y="5005184"/>
             <a:ext cx="1600200" cy="256032"/>
           </a:xfrm>
           <a:prstGeom prst="rect">
@@ -14501,7 +14955,7 @@
         </p:nvSpPr>
         <p:spPr>
           <a:xfrm>
-            <a:off x="7863840" y="4617720"/>
+            <a:off x="7863840" y="5014328"/>
             <a:ext cx="2743200" cy="256032"/>
           </a:xfrm>
           <a:prstGeom prst="rect">
@@ -14867,44 +15321,44 @@
         <a:sysClr val="window" lastClr="FFFFFF"/>
       </a:lt1>
       <a:dk2>
-        <a:srgbClr val="1F497D"/>
+        <a:srgbClr val="0E2841"/>
       </a:dk2>
       <a:lt2>
-        <a:srgbClr val="EEECE1"/>
+        <a:srgbClr val="E8E8E8"/>
       </a:lt2>
       <a:accent1>
-        <a:srgbClr val="4F81BD"/>
+        <a:srgbClr val="156082"/>
       </a:accent1>
       <a:accent2>
-        <a:srgbClr val="C0504D"/>
+        <a:srgbClr val="E97132"/>
       </a:accent2>
       <a:accent3>
-        <a:srgbClr val="9BBB59"/>
+        <a:srgbClr val="196B24"/>
       </a:accent3>
       <a:accent4>
-        <a:srgbClr val="8064A2"/>
+        <a:srgbClr val="0F9ED5"/>
       </a:accent4>
       <a:accent5>
-        <a:srgbClr val="4BACC6"/>
+        <a:srgbClr val="A02B93"/>
       </a:accent5>
       <a:accent6>
-        <a:srgbClr val="F79646"/>
+        <a:srgbClr val="4EA72E"/>
       </a:accent6>
       <a:hlink>
-        <a:srgbClr val="0000FF"/>
+        <a:srgbClr val="467886"/>
       </a:hlink>
       <a:folHlink>
-        <a:srgbClr val="800080"/>
+        <a:srgbClr val="96607D"/>
       </a:folHlink>
     </a:clrScheme>
     <a:fontScheme name="Office">
       <a:majorFont>
-        <a:latin typeface="Calibri"/>
+        <a:latin typeface="Aptos Display" panose="02110004020202020204"/>
         <a:ea typeface=""/>
         <a:cs typeface=""/>
-        <a:font script="Jpan" typeface="ＭＳ Ｐゴシック"/>
+        <a:font script="Jpan" typeface="游ゴシック Light"/>
         <a:font script="Hang" typeface="맑은 고딕"/>
-        <a:font script="Hans" typeface="宋体"/>
+        <a:font script="Hans" typeface="等线 Light"/>
         <a:font script="Hant" typeface="新細明體"/>
         <a:font script="Arab" typeface="Times New Roman"/>
         <a:font script="Hebr" typeface="Times New Roman"/>
@@ -14932,14 +15386,31 @@
         <a:font script="Viet" typeface="Times New Roman"/>
         <a:font script="Uigh" typeface="Microsoft Uighur"/>
         <a:font script="Geor" typeface="Sylfaen"/>
+        <a:font script="Armn" typeface="Arial"/>
+        <a:font script="Bugi" typeface="Leelawadee UI"/>
+        <a:font script="Bopo" typeface="Microsoft JhengHei"/>
+        <a:font script="Java" typeface="Javanese Text"/>
+        <a:font script="Lisu" typeface="Segoe UI"/>
+        <a:font script="Mymr" typeface="Myanmar Text"/>
+        <a:font script="Nkoo" typeface="Ebrima"/>
+        <a:font script="Olck" typeface="Nirmala UI"/>
+        <a:font script="Osma" typeface="Ebrima"/>
+        <a:font script="Phag" typeface="Phagspa"/>
+        <a:font script="Syrn" typeface="Estrangelo Edessa"/>
+        <a:font script="Syrj" typeface="Estrangelo Edessa"/>
+        <a:font script="Syre" typeface="Estrangelo Edessa"/>
+        <a:font script="Sora" typeface="Nirmala UI"/>
+        <a:font script="Tale" typeface="Microsoft Tai Le"/>
+        <a:font script="Talu" typeface="Microsoft New Tai Lue"/>
+        <a:font script="Tfng" typeface="Ebrima"/>
       </a:majorFont>
       <a:minorFont>
-        <a:latin typeface="Calibri"/>
+        <a:latin typeface="Aptos" panose="02110004020202020204"/>
         <a:ea typeface=""/>
         <a:cs typeface=""/>
-        <a:font script="Jpan" typeface="ＭＳ Ｐゴシック"/>
+        <a:font script="Jpan" typeface="游ゴシック"/>
         <a:font script="Hang" typeface="맑은 고딕"/>
-        <a:font script="Hans" typeface="宋体"/>
+        <a:font script="Hans" typeface="等线"/>
         <a:font script="Hant" typeface="新細明體"/>
         <a:font script="Arab" typeface="Arial"/>
         <a:font script="Hebr" typeface="Arial"/>
@@ -14967,6 +15438,23 @@
         <a:font script="Viet" typeface="Arial"/>
         <a:font script="Uigh" typeface="Microsoft Uighur"/>
         <a:font script="Geor" typeface="Sylfaen"/>
+        <a:font script="Armn" typeface="Arial"/>
+        <a:font script="Bugi" typeface="Leelawadee UI"/>
+        <a:font script="Bopo" typeface="Microsoft JhengHei"/>
+        <a:font script="Java" typeface="Javanese Text"/>
+        <a:font script="Lisu" typeface="Segoe UI"/>
+        <a:font script="Mymr" typeface="Myanmar Text"/>
+        <a:font script="Nkoo" typeface="Ebrima"/>
+        <a:font script="Olck" typeface="Nirmala UI"/>
+        <a:font script="Osma" typeface="Ebrima"/>
+        <a:font script="Phag" typeface="Phagspa"/>
+        <a:font script="Syrn" typeface="Estrangelo Edessa"/>
+        <a:font script="Syrj" typeface="Estrangelo Edessa"/>
+        <a:font script="Syre" typeface="Estrangelo Edessa"/>
+        <a:font script="Sora" typeface="Nirmala UI"/>
+        <a:font script="Tale" typeface="Microsoft Tai Le"/>
+        <a:font script="Talu" typeface="Microsoft New Tai Lue"/>
+        <a:font script="Tfng" typeface="Ebrima"/>
       </a:minorFont>
     </a:fontScheme>
     <a:fmtScheme name="Office">
@@ -14978,180 +15466,136 @@
           <a:gsLst>
             <a:gs pos="0">
               <a:schemeClr val="phClr">
-                <a:tint val="50000"/>
-                <a:satMod val="300000"/>
+                <a:lumMod val="110000"/>
+                <a:satMod val="105000"/>
+                <a:tint val="67000"/>
               </a:schemeClr>
             </a:gs>
-            <a:gs pos="35000">
+            <a:gs pos="50000">
               <a:schemeClr val="phClr">
-                <a:tint val="37000"/>
-                <a:satMod val="300000"/>
+                <a:lumMod val="105000"/>
+                <a:satMod val="103000"/>
+                <a:tint val="73000"/>
               </a:schemeClr>
             </a:gs>
             <a:gs pos="100000">
               <a:schemeClr val="phClr">
-                <a:tint val="15000"/>
-                <a:satMod val="350000"/>
+                <a:lumMod val="105000"/>
+                <a:satMod val="109000"/>
+                <a:tint val="81000"/>
               </a:schemeClr>
             </a:gs>
           </a:gsLst>
-          <a:lin ang="16200000" scaled="1"/>
+          <a:lin ang="5400000" scaled="0"/>
         </a:gradFill>
         <a:gradFill rotWithShape="1">
           <a:gsLst>
             <a:gs pos="0">
               <a:schemeClr val="phClr">
-                <a:tint val="100000"/>
+                <a:satMod val="103000"/>
+                <a:lumMod val="102000"/>
+                <a:tint val="94000"/>
+              </a:schemeClr>
+            </a:gs>
+            <a:gs pos="50000">
+              <a:schemeClr val="phClr">
+                <a:satMod val="110000"/>
+                <a:lumMod val="100000"/>
                 <a:shade val="100000"/>
-                <a:satMod val="130000"/>
               </a:schemeClr>
             </a:gs>
             <a:gs pos="100000">
               <a:schemeClr val="phClr">
-                <a:tint val="50000"/>
-                <a:shade val="100000"/>
-                <a:satMod val="350000"/>
+                <a:lumMod val="99000"/>
+                <a:satMod val="120000"/>
+                <a:shade val="78000"/>
               </a:schemeClr>
             </a:gs>
           </a:gsLst>
-          <a:lin ang="16200000" scaled="0"/>
+          <a:lin ang="5400000" scaled="0"/>
         </a:gradFill>
       </a:fillStyleLst>
       <a:lnStyleLst>
-        <a:ln w="9525" cap="flat" cmpd="sng" algn="ctr">
+        <a:ln w="12700" cap="flat" cmpd="sng" algn="ctr">
           <a:solidFill>
-            <a:schemeClr val="phClr">
-              <a:shade val="95000"/>
-              <a:satMod val="105000"/>
-            </a:schemeClr>
+            <a:schemeClr val="phClr"/>
           </a:solidFill>
           <a:prstDash val="solid"/>
+          <a:miter lim="800000"/>
+        </a:ln>
+        <a:ln w="19050" cap="flat" cmpd="sng" algn="ctr">
+          <a:solidFill>
+            <a:schemeClr val="phClr"/>
+          </a:solidFill>
+          <a:prstDash val="solid"/>
+          <a:miter lim="800000"/>
         </a:ln>
         <a:ln w="25400" cap="flat" cmpd="sng" algn="ctr">
           <a:solidFill>
             <a:schemeClr val="phClr"/>
           </a:solidFill>
           <a:prstDash val="solid"/>
-        </a:ln>
-        <a:ln w="38100" cap="flat" cmpd="sng" algn="ctr">
-          <a:solidFill>
-            <a:schemeClr val="phClr"/>
-          </a:solidFill>
-          <a:prstDash val="solid"/>
+          <a:miter lim="800000"/>
         </a:ln>
       </a:lnStyleLst>
       <a:effectStyleLst>
         <a:effectStyle>
+          <a:effectLst/>
+        </a:effectStyle>
+        <a:effectStyle>
+          <a:effectLst/>
+        </a:effectStyle>
+        <a:effectStyle>
           <a:effectLst>
-            <a:outerShdw blurRad="40000" dist="20000" dir="5400000" rotWithShape="0">
+            <a:outerShdw blurRad="57150" dist="19050" dir="5400000" algn="ctr" rotWithShape="0">
               <a:srgbClr val="000000">
-                <a:alpha val="38000"/>
+                <a:alpha val="63000"/>
               </a:srgbClr>
             </a:outerShdw>
           </a:effectLst>
-        </a:effectStyle>
-        <a:effectStyle>
-          <a:effectLst>
-            <a:outerShdw blurRad="40000" dist="23000" dir="5400000" rotWithShape="0">
-              <a:srgbClr val="000000">
-                <a:alpha val="35000"/>
-              </a:srgbClr>
-            </a:outerShdw>
-          </a:effectLst>
-        </a:effectStyle>
-        <a:effectStyle>
-          <a:effectLst>
-            <a:outerShdw blurRad="40000" dist="23000" dir="5400000" rotWithShape="0">
-              <a:srgbClr val="000000">
-                <a:alpha val="35000"/>
-              </a:srgbClr>
-            </a:outerShdw>
-          </a:effectLst>
-          <a:scene3d>
-            <a:camera prst="orthographicFront">
-              <a:rot lat="0" lon="0" rev="0"/>
-            </a:camera>
-            <a:lightRig rig="threePt" dir="t">
-              <a:rot lat="0" lon="0" rev="1200000"/>
-            </a:lightRig>
-          </a:scene3d>
-          <a:sp3d>
-            <a:bevelT w="63500" h="25400"/>
-          </a:sp3d>
         </a:effectStyle>
       </a:effectStyleLst>
       <a:bgFillStyleLst>
         <a:solidFill>
           <a:schemeClr val="phClr"/>
         </a:solidFill>
+        <a:solidFill>
+          <a:schemeClr val="phClr">
+            <a:tint val="95000"/>
+            <a:satMod val="170000"/>
+          </a:schemeClr>
+        </a:solidFill>
         <a:gradFill rotWithShape="1">
           <a:gsLst>
             <a:gs pos="0">
               <a:schemeClr val="phClr">
-                <a:tint val="40000"/>
-                <a:satMod val="350000"/>
+                <a:tint val="93000"/>
+                <a:satMod val="150000"/>
+                <a:shade val="98000"/>
+                <a:lumMod val="102000"/>
               </a:schemeClr>
             </a:gs>
-            <a:gs pos="40000">
+            <a:gs pos="50000">
               <a:schemeClr val="phClr">
-                <a:tint val="45000"/>
-                <a:shade val="99000"/>
-                <a:satMod val="350000"/>
+                <a:tint val="98000"/>
+                <a:satMod val="130000"/>
+                <a:shade val="90000"/>
+                <a:lumMod val="103000"/>
               </a:schemeClr>
             </a:gs>
             <a:gs pos="100000">
               <a:schemeClr val="phClr">
-                <a:shade val="20000"/>
-                <a:satMod val="255000"/>
+                <a:shade val="63000"/>
+                <a:satMod val="120000"/>
               </a:schemeClr>
             </a:gs>
           </a:gsLst>
-          <a:path path="circle">
-            <a:fillToRect l="50000" t="-80000" r="50000" b="180000"/>
-          </a:path>
-        </a:gradFill>
-        <a:gradFill rotWithShape="1">
-          <a:gsLst>
-            <a:gs pos="0">
-              <a:schemeClr val="phClr">
-                <a:tint val="80000"/>
-                <a:satMod val="300000"/>
-              </a:schemeClr>
-            </a:gs>
-            <a:gs pos="100000">
-              <a:schemeClr val="phClr">
-                <a:shade val="30000"/>
-                <a:satMod val="200000"/>
-              </a:schemeClr>
-            </a:gs>
-          </a:gsLst>
-          <a:path path="circle">
-            <a:fillToRect l="50000" t="50000" r="50000" b="50000"/>
-          </a:path>
+          <a:lin ang="5400000" scaled="0"/>
         </a:gradFill>
       </a:bgFillStyleLst>
     </a:fmtScheme>
   </a:themeElements>
   <a:objectDefaults>
-    <a:spDef>
-      <a:spPr/>
-      <a:bodyPr/>
-      <a:lstStyle/>
-      <a:style>
-        <a:lnRef idx="1">
-          <a:schemeClr val="accent1"/>
-        </a:lnRef>
-        <a:fillRef idx="3">
-          <a:schemeClr val="accent1"/>
-        </a:fillRef>
-        <a:effectRef idx="2">
-          <a:schemeClr val="accent1"/>
-        </a:effectRef>
-        <a:fontRef idx="minor">
-          <a:schemeClr val="lt1"/>
-        </a:fontRef>
-      </a:style>
-    </a:spDef>
     <a:lnDef>
       <a:spPr/>
       <a:bodyPr/>
@@ -15173,5 +15617,10 @@
     </a:lnDef>
   </a:objectDefaults>
   <a:extraClrSchemeLst/>
+  <a:extLst>
+    <a:ext uri="{05A4C25C-085E-4340-85A3-A5531E510DB2}">
+      <thm15:themeFamily xmlns:thm15="http://schemas.microsoft.com/office/thememl/2012/main" name="Office Theme" id="{2E142A2C-CD16-42D6-873A-C26D2A0506FA}" vid="{1BDDFF52-6CD6-40A5-AB3C-68EB2F1E4D0A}"/>
+    </a:ext>
+  </a:extLst>
 </a:theme>
 </file>